--- a/docs/Alternative Approach - Summary.pptx
+++ b/docs/Alternative Approach - Summary.pptx
@@ -6024,7 +6024,7 @@
                 </a:solidFill>
                 <a:latin typeface="Aptos"/>
               </a:rPr>
-              <a:t>Agentic ops (L2/L3) removes the operational cognitive load — so build-minded engineers can own what they run.</a:t>
+              <a:t>Agentic ops (Ops L2/L3) removes the operational cognitive load — so build-minded engineers can own what they run.</a:t>
             </a:r>
           </a:p>
         </p:txBody>
@@ -6668,7 +6668,7 @@
                 </a:solidFill>
                 <a:latin typeface="Aptos"/>
               </a:rPr>
-              <a:t>Skills coverage, and knowledge transfer that sticks</a:t>
+              <a:t>Skills coverage — Ops L1→L3 into Development, and knowledge transfer that sticks</a:t>
             </a:r>
           </a:p>
         </p:txBody>
@@ -6726,8 +6726,8 @@
           <p:nvPr/>
         </p:nvGraphicFramePr>
         <p:xfrm>
-          <a:off x="640080" y="1463040"/>
-          <a:ext cx="5852160" cy="2816352"/>
+          <a:off x="640080" y="1417320"/>
+          <a:ext cx="10972800" cy="3200400"/>
         </p:xfrm>
         <a:graphic>
           <a:graphicData uri="http://schemas.openxmlformats.org/drawingml/2006/table">
@@ -6736,18 +6736,20 @@
                 <a:tableStyleId>{5C22544A-7EE6-4342-B048-85BDC9FD1C3A}</a:tableStyleId>
               </a:tblPr>
               <a:tblGrid>
-                <a:gridCol w="3291840"/>
-                <a:gridCol w="1280160"/>
-                <a:gridCol w="1280160"/>
+                <a:gridCol w="2011680"/>
+                <a:gridCol w="2240280"/>
+                <a:gridCol w="2240280"/>
+                <a:gridCol w="2240280"/>
+                <a:gridCol w="2240280"/>
               </a:tblGrid>
-              <a:tr h="402336">
+              <a:tr h="457200">
                 <a:tc>
                   <a:txBody>
                     <a:bodyPr wrap="square"/>
                     <a:lstStyle/>
                     <a:p>
                       <a:r>
-                        <a:rPr sz="1050" b="1">
+                        <a:rPr sz="850" b="1">
                           <a:solidFill>
                             <a:srgbClr val="5C6066"/>
                           </a:solidFill>
@@ -6769,13 +6771,13 @@
                     <a:lstStyle/>
                     <a:p>
                       <a:r>
-                        <a:rPr sz="1050" b="1">
+                        <a:rPr sz="850" b="1">
                           <a:solidFill>
                             <a:srgbClr val="5C6066"/>
                           </a:solidFill>
                           <a:latin typeface="Aptos"/>
                         </a:rPr>
-                        <a:t>Dev</a:t>
+                        <a:t>Ops L1 · Monitor &amp; route</a:t>
                       </a:r>
                     </a:p>
                   </a:txBody>
@@ -6791,13 +6793,57 @@
                     <a:lstStyle/>
                     <a:p>
                       <a:r>
-                        <a:rPr sz="1050" b="1">
+                        <a:rPr sz="850" b="1">
                           <a:solidFill>
                             <a:srgbClr val="5C6066"/>
                           </a:solidFill>
                           <a:latin typeface="Aptos"/>
                         </a:rPr>
-                        <a:t>Ops</a:t>
+                        <a:t>Ops L2 · Diagnose &amp; restore</a:t>
+                      </a:r>
+                    </a:p>
+                  </a:txBody>
+                  <a:tcPr marL="73152" marR="54864" marT="27432" marB="27432" anchor="ctr">
+                    <a:solidFill>
+                      <a:srgbClr val="FBFAF8"/>
+                    </a:solidFill>
+                  </a:tcPr>
+                </a:tc>
+                <a:tc>
+                  <a:txBody>
+                    <a:bodyPr wrap="square"/>
+                    <a:lstStyle/>
+                    <a:p>
+                      <a:r>
+                        <a:rPr sz="850" b="1">
+                          <a:solidFill>
+                            <a:srgbClr val="5C6066"/>
+                          </a:solidFill>
+                          <a:latin typeface="Aptos"/>
+                        </a:rPr>
+                        <a:t>Ops L3 · Engineer fix</a:t>
+                      </a:r>
+                    </a:p>
+                  </a:txBody>
+                  <a:tcPr marL="73152" marR="54864" marT="27432" marB="27432" anchor="ctr">
+                    <a:solidFill>
+                      <a:srgbClr val="FBFAF8"/>
+                    </a:solidFill>
+                  </a:tcPr>
+                </a:tc>
+                <a:tc>
+                  <a:txBody>
+                    <a:bodyPr wrap="square"/>
+                    <a:lstStyle/>
+                    <a:p>
+                      <a:r>
+                        <a:rPr sz="850" b="1">
+                          <a:solidFill>
+                            <a:srgbClr val="5C6066"/>
+                          </a:solidFill>
+                          <a:latin typeface="Aptos"/>
+                        </a:rPr>
+                        <a:t>Development · Build &amp; change</a:t>
                       </a:r>
                     </a:p>
                   </a:txBody>
@@ -6808,14 +6854,14 @@
                   </a:tcPr>
                 </a:tc>
               </a:tr>
-              <a:tr h="402336">
+              <a:tr h="457200">
                 <a:tc>
                   <a:txBody>
                     <a:bodyPr wrap="square"/>
                     <a:lstStyle/>
                     <a:p>
                       <a:r>
-                        <a:rPr sz="1100" b="1">
+                        <a:rPr sz="780" b="1">
                           <a:solidFill>
                             <a:srgbClr val="16181D"/>
                           </a:solidFill>
@@ -6837,13 +6883,13 @@
                     <a:lstStyle/>
                     <a:p>
                       <a:r>
-                        <a:rPr sz="1100" b="0">
+                        <a:rPr sz="780" b="0">
                           <a:solidFill>
                             <a:srgbClr val="16181D"/>
                           </a:solidFill>
                           <a:latin typeface="Aptos"/>
                         </a:rPr>
-                        <a:t>●●●</a:t>
+                        <a:t>Pipeline alerts, failed-run routing, first checks</a:t>
                       </a:r>
                     </a:p>
                   </a:txBody>
@@ -6859,13 +6905,57 @@
                     <a:lstStyle/>
                     <a:p>
                       <a:r>
-                        <a:rPr sz="1100" b="0">
+                        <a:rPr sz="780" b="0">
                           <a:solidFill>
                             <a:srgbClr val="16181D"/>
                           </a:solidFill>
                           <a:latin typeface="Aptos"/>
                         </a:rPr>
-                        <a:t>●●○</a:t>
+                        <a:t>Rerun, quarantine, DQ triage, lineage lookup</a:t>
+                      </a:r>
+                    </a:p>
+                  </a:txBody>
+                  <a:tcPr marL="73152" marR="54864" marT="27432" marB="27432" anchor="ctr">
+                    <a:solidFill>
+                      <a:srgbClr val="FFFFFF"/>
+                    </a:solidFill>
+                  </a:tcPr>
+                </a:tc>
+                <a:tc>
+                  <a:txBody>
+                    <a:bodyPr wrap="square"/>
+                    <a:lstStyle/>
+                    <a:p>
+                      <a:r>
+                        <a:rPr sz="780" b="0">
+                          <a:solidFill>
+                            <a:srgbClr val="16181D"/>
+                          </a:solidFill>
+                          <a:latin typeface="Aptos"/>
+                        </a:rPr>
+                        <a:t>Spark / Delta fix PR, model and job optimisation</a:t>
+                      </a:r>
+                    </a:p>
+                  </a:txBody>
+                  <a:tcPr marL="73152" marR="54864" marT="27432" marB="27432" anchor="ctr">
+                    <a:solidFill>
+                      <a:srgbClr val="FFFFFF"/>
+                    </a:solidFill>
+                  </a:tcPr>
+                </a:tc>
+                <a:tc>
+                  <a:txBody>
+                    <a:bodyPr wrap="square"/>
+                    <a:lstStyle/>
+                    <a:p>
+                      <a:r>
+                        <a:rPr sz="780" b="0">
+                          <a:solidFill>
+                            <a:srgbClr val="16181D"/>
+                          </a:solidFill>
+                          <a:latin typeface="Aptos"/>
+                        </a:rPr>
+                        <a:t>Data-product build, medallion design, reusable templates</a:t>
                       </a:r>
                     </a:p>
                   </a:txBody>
@@ -6876,14 +6966,14 @@
                   </a:tcPr>
                 </a:tc>
               </a:tr>
-              <a:tr h="402336">
+              <a:tr h="457200">
                 <a:tc>
                   <a:txBody>
                     <a:bodyPr wrap="square"/>
                     <a:lstStyle/>
                     <a:p>
                       <a:r>
-                        <a:rPr sz="1100" b="1">
+                        <a:rPr sz="780" b="1">
                           <a:solidFill>
                             <a:srgbClr val="16181D"/>
                           </a:solidFill>
@@ -6905,13 +6995,13 @@
                     <a:lstStyle/>
                     <a:p>
                       <a:r>
-                        <a:rPr sz="1100" b="0">
+                        <a:rPr sz="780" b="0">
                           <a:solidFill>
                             <a:srgbClr val="16181D"/>
                           </a:solidFill>
                           <a:latin typeface="Aptos"/>
                         </a:rPr>
-                        <a:t>●●●</a:t>
+                        <a:t>Lag, schema and connector alerts</a:t>
                       </a:r>
                     </a:p>
                   </a:txBody>
@@ -6927,13 +7017,57 @@
                     <a:lstStyle/>
                     <a:p>
                       <a:r>
-                        <a:rPr sz="1100" b="0">
+                        <a:rPr sz="780" b="0">
                           <a:solidFill>
                             <a:srgbClr val="16181D"/>
                           </a:solidFill>
                           <a:latin typeface="Aptos"/>
                         </a:rPr>
-                        <a:t>●●●</a:t>
+                        <a:t>Replay, rebalance, connector restart, config triage</a:t>
+                      </a:r>
+                    </a:p>
+                  </a:txBody>
+                  <a:tcPr marL="73152" marR="54864" marT="27432" marB="27432" anchor="ctr">
+                    <a:solidFill>
+                      <a:srgbClr val="FFFFFF"/>
+                    </a:solidFill>
+                  </a:tcPr>
+                </a:tc>
+                <a:tc>
+                  <a:txBody>
+                    <a:bodyPr wrap="square"/>
+                    <a:lstStyle/>
+                    <a:p>
+                      <a:r>
+                        <a:rPr sz="780" b="0">
+                          <a:solidFill>
+                            <a:srgbClr val="16181D"/>
+                          </a:solidFill>
+                          <a:latin typeface="Aptos"/>
+                        </a:rPr>
+                        <a:t>Connector, schema or consumer fix PR</a:t>
+                      </a:r>
+                    </a:p>
+                  </a:txBody>
+                  <a:tcPr marL="73152" marR="54864" marT="27432" marB="27432" anchor="ctr">
+                    <a:solidFill>
+                      <a:srgbClr val="FFFFFF"/>
+                    </a:solidFill>
+                  </a:tcPr>
+                </a:tc>
+                <a:tc>
+                  <a:txBody>
+                    <a:bodyPr wrap="square"/>
+                    <a:lstStyle/>
+                    <a:p>
+                      <a:r>
+                        <a:rPr sz="780" b="0">
+                          <a:solidFill>
+                            <a:srgbClr val="16181D"/>
+                          </a:solidFill>
+                          <a:latin typeface="Aptos"/>
+                        </a:rPr>
+                        <a:t>Event contracts, producer / consumer engineering</a:t>
                       </a:r>
                     </a:p>
                   </a:txBody>
@@ -6944,14 +7078,14 @@
                   </a:tcPr>
                 </a:tc>
               </a:tr>
-              <a:tr h="402336">
+              <a:tr h="457200">
                 <a:tc>
                   <a:txBody>
                     <a:bodyPr wrap="square"/>
                     <a:lstStyle/>
                     <a:p>
                       <a:r>
-                        <a:rPr sz="1100" b="1">
+                        <a:rPr sz="780" b="1">
                           <a:solidFill>
                             <a:srgbClr val="16181D"/>
                           </a:solidFill>
@@ -6973,13 +7107,13 @@
                     <a:lstStyle/>
                     <a:p>
                       <a:r>
-                        <a:rPr sz="1100" b="0">
+                        <a:rPr sz="780" b="0">
                           <a:solidFill>
                             <a:srgbClr val="16181D"/>
                           </a:solidFill>
                           <a:latin typeface="Aptos"/>
                         </a:rPr>
-                        <a:t>●●●</a:t>
+                        <a:t>Failed-build routing and known-error checks</a:t>
                       </a:r>
                     </a:p>
                   </a:txBody>
@@ -6995,13 +7129,57 @@
                     <a:lstStyle/>
                     <a:p>
                       <a:r>
-                        <a:rPr sz="1100" b="0">
+                        <a:rPr sz="780" b="0">
                           <a:solidFill>
                             <a:srgbClr val="16181D"/>
                           </a:solidFill>
                           <a:latin typeface="Aptos"/>
                         </a:rPr>
-                        <a:t>●●●</a:t>
+                        <a:t>Runner, secret and pipeline recovery</a:t>
+                      </a:r>
+                    </a:p>
+                  </a:txBody>
+                  <a:tcPr marL="73152" marR="54864" marT="27432" marB="27432" anchor="ctr">
+                    <a:solidFill>
+                      <a:srgbClr val="FFFFFF"/>
+                    </a:solidFill>
+                  </a:tcPr>
+                </a:tc>
+                <a:tc>
+                  <a:txBody>
+                    <a:bodyPr wrap="square"/>
+                    <a:lstStyle/>
+                    <a:p>
+                      <a:r>
+                        <a:rPr sz="780" b="0">
+                          <a:solidFill>
+                            <a:srgbClr val="16181D"/>
+                          </a:solidFill>
+                          <a:latin typeface="Aptos"/>
+                        </a:rPr>
+                        <a:t>Workflow / action refactor PR, policy-gate fix</a:t>
+                      </a:r>
+                    </a:p>
+                  </a:txBody>
+                  <a:tcPr marL="73152" marR="54864" marT="27432" marB="27432" anchor="ctr">
+                    <a:solidFill>
+                      <a:srgbClr val="FFFFFF"/>
+                    </a:solidFill>
+                  </a:tcPr>
+                </a:tc>
+                <a:tc>
+                  <a:txBody>
+                    <a:bodyPr wrap="square"/>
+                    <a:lstStyle/>
+                    <a:p>
+                      <a:r>
+                        <a:rPr sz="780" b="0">
+                          <a:solidFill>
+                            <a:srgbClr val="16181D"/>
+                          </a:solidFill>
+                          <a:latin typeface="Aptos"/>
+                        </a:rPr>
+                        <a:t>GitHub migration factory and platform pipeline patterns</a:t>
                       </a:r>
                     </a:p>
                   </a:txBody>
@@ -7012,14 +7190,14 @@
                   </a:tcPr>
                 </a:tc>
               </a:tr>
-              <a:tr h="402336">
+              <a:tr h="457200">
                 <a:tc>
                   <a:txBody>
                     <a:bodyPr wrap="square"/>
                     <a:lstStyle/>
                     <a:p>
                       <a:r>
-                        <a:rPr sz="1100" b="1">
+                        <a:rPr sz="780" b="1">
                           <a:solidFill>
                             <a:srgbClr val="16181D"/>
                           </a:solidFill>
@@ -7041,13 +7219,13 @@
                     <a:lstStyle/>
                     <a:p>
                       <a:r>
-                        <a:rPr sz="1100" b="0">
+                        <a:rPr sz="780" b="0">
                           <a:solidFill>
                             <a:srgbClr val="16181D"/>
                           </a:solidFill>
                           <a:latin typeface="Aptos"/>
                         </a:rPr>
-                        <a:t>●●●</a:t>
+                        <a:t>Pod, node, quota and certificate monitoring</a:t>
                       </a:r>
                     </a:p>
                   </a:txBody>
@@ -7063,13 +7241,57 @@
                     <a:lstStyle/>
                     <a:p>
                       <a:r>
-                        <a:rPr sz="1100" b="0">
+                        <a:rPr sz="780" b="0">
                           <a:solidFill>
                             <a:srgbClr val="16181D"/>
                           </a:solidFill>
                           <a:latin typeface="Aptos"/>
                         </a:rPr>
-                        <a:t>●●●</a:t>
+                        <a:t>Rollback, scale, config restore and access triage</a:t>
+                      </a:r>
+                    </a:p>
+                  </a:txBody>
+                  <a:tcPr marL="73152" marR="54864" marT="27432" marB="27432" anchor="ctr">
+                    <a:solidFill>
+                      <a:srgbClr val="FFFFFF"/>
+                    </a:solidFill>
+                  </a:tcPr>
+                </a:tc>
+                <a:tc>
+                  <a:txBody>
+                    <a:bodyPr wrap="square"/>
+                    <a:lstStyle/>
+                    <a:p>
+                      <a:r>
+                        <a:rPr sz="780" b="0">
+                          <a:solidFill>
+                            <a:srgbClr val="16181D"/>
+                          </a:solidFill>
+                          <a:latin typeface="Aptos"/>
+                        </a:rPr>
+                        <a:t>IaC, Helm or platform fix PR</a:t>
+                      </a:r>
+                    </a:p>
+                  </a:txBody>
+                  <a:tcPr marL="73152" marR="54864" marT="27432" marB="27432" anchor="ctr">
+                    <a:solidFill>
+                      <a:srgbClr val="FFFFFF"/>
+                    </a:solidFill>
+                  </a:tcPr>
+                </a:tc>
+                <a:tc>
+                  <a:txBody>
+                    <a:bodyPr wrap="square"/>
+                    <a:lstStyle/>
+                    <a:p>
+                      <a:r>
+                        <a:rPr sz="780" b="0">
+                          <a:solidFill>
+                            <a:srgbClr val="16181D"/>
+                          </a:solidFill>
+                          <a:latin typeface="Aptos"/>
+                        </a:rPr>
+                        <a:t>PAKS recipes, self-service patterns, platform engineering</a:t>
                       </a:r>
                     </a:p>
                   </a:txBody>
@@ -7080,14 +7302,14 @@
                   </a:tcPr>
                 </a:tc>
               </a:tr>
-              <a:tr h="402336">
+              <a:tr h="457200">
                 <a:tc>
                   <a:txBody>
                     <a:bodyPr wrap="square"/>
                     <a:lstStyle/>
                     <a:p>
                       <a:r>
-                        <a:rPr sz="1100" b="1">
+                        <a:rPr sz="780" b="1">
                           <a:solidFill>
                             <a:srgbClr val="16181D"/>
                           </a:solidFill>
@@ -7109,13 +7331,13 @@
                     <a:lstStyle/>
                     <a:p>
                       <a:r>
-                        <a:rPr sz="1100" b="0">
+                        <a:rPr sz="780" b="0">
                           <a:solidFill>
                             <a:srgbClr val="16181D"/>
                           </a:solidFill>
                           <a:latin typeface="Aptos"/>
                         </a:rPr>
-                        <a:t>●●○</a:t>
+                        <a:t>Alert intake, severity routing, dashboard checks</a:t>
                       </a:r>
                     </a:p>
                   </a:txBody>
@@ -7131,13 +7353,57 @@
                     <a:lstStyle/>
                     <a:p>
                       <a:r>
-                        <a:rPr sz="1100" b="0">
+                        <a:rPr sz="780" b="0">
                           <a:solidFill>
                             <a:srgbClr val="16181D"/>
                           </a:solidFill>
                           <a:latin typeface="Aptos"/>
                         </a:rPr>
-                        <a:t>●●●</a:t>
+                        <a:t>Correlation, RCA draft, runbook-guided restore</a:t>
+                      </a:r>
+                    </a:p>
+                  </a:txBody>
+                  <a:tcPr marL="73152" marR="54864" marT="27432" marB="27432" anchor="ctr">
+                    <a:solidFill>
+                      <a:srgbClr val="FFFFFF"/>
+                    </a:solidFill>
+                  </a:tcPr>
+                </a:tc>
+                <a:tc>
+                  <a:txBody>
+                    <a:bodyPr wrap="square"/>
+                    <a:lstStyle/>
+                    <a:p>
+                      <a:r>
+                        <a:rPr sz="780" b="0">
+                          <a:solidFill>
+                            <a:srgbClr val="16181D"/>
+                          </a:solidFill>
+                          <a:latin typeface="Aptos"/>
+                        </a:rPr>
+                        <a:t>Instrumentation, SLO or reliability fix PR</a:t>
+                      </a:r>
+                    </a:p>
+                  </a:txBody>
+                  <a:tcPr marL="73152" marR="54864" marT="27432" marB="27432" anchor="ctr">
+                    <a:solidFill>
+                      <a:srgbClr val="FFFFFF"/>
+                    </a:solidFill>
+                  </a:tcPr>
+                </a:tc>
+                <a:tc>
+                  <a:txBody>
+                    <a:bodyPr wrap="square"/>
+                    <a:lstStyle/>
+                    <a:p>
+                      <a:r>
+                        <a:rPr sz="780" b="0">
+                          <a:solidFill>
+                            <a:srgbClr val="16181D"/>
+                          </a:solidFill>
+                          <a:latin typeface="Aptos"/>
+                        </a:rPr>
+                        <a:t>Observability-by-design and resilience engineering</a:t>
                       </a:r>
                     </a:p>
                   </a:txBody>
@@ -7148,14 +7414,14 @@
                   </a:tcPr>
                 </a:tc>
               </a:tr>
-              <a:tr h="402336">
+              <a:tr h="457200">
                 <a:tc>
                   <a:txBody>
                     <a:bodyPr wrap="square"/>
                     <a:lstStyle/>
                     <a:p>
                       <a:r>
-                        <a:rPr sz="1100" b="1">
+                        <a:rPr sz="780" b="1">
                           <a:solidFill>
                             <a:srgbClr val="16181D"/>
                           </a:solidFill>
@@ -7177,13 +7443,13 @@
                     <a:lstStyle/>
                     <a:p>
                       <a:r>
-                        <a:rPr sz="1100" b="0">
+                        <a:rPr sz="780" b="0">
                           <a:solidFill>
                             <a:srgbClr val="16181D"/>
                           </a:solidFill>
                           <a:latin typeface="Aptos"/>
                         </a:rPr>
-                        <a:t>●●●</a:t>
+                        <a:t>Smoke-test results and release-health checks</a:t>
                       </a:r>
                     </a:p>
                   </a:txBody>
@@ -7199,13 +7465,57 @@
                     <a:lstStyle/>
                     <a:p>
                       <a:r>
-                        <a:rPr sz="1100" b="0">
+                        <a:rPr sz="780" b="0">
                           <a:solidFill>
                             <a:srgbClr val="16181D"/>
                           </a:solidFill>
                           <a:latin typeface="Aptos"/>
                         </a:rPr>
-                        <a:t>●●○</a:t>
+                        <a:t>Regression triage, data-quality failure isolation</a:t>
+                      </a:r>
+                    </a:p>
+                  </a:txBody>
+                  <a:tcPr marL="73152" marR="54864" marT="27432" marB="27432" anchor="ctr">
+                    <a:solidFill>
+                      <a:srgbClr val="FFFFFF"/>
+                    </a:solidFill>
+                  </a:tcPr>
+                </a:tc>
+                <a:tc>
+                  <a:txBody>
+                    <a:bodyPr wrap="square"/>
+                    <a:lstStyle/>
+                    <a:p>
+                      <a:r>
+                        <a:rPr sz="780" b="0">
+                          <a:solidFill>
+                            <a:srgbClr val="16181D"/>
+                          </a:solidFill>
+                          <a:latin typeface="Aptos"/>
+                        </a:rPr>
+                        <a:t>Test-harness and quality-gate fix PR</a:t>
+                      </a:r>
+                    </a:p>
+                  </a:txBody>
+                  <a:tcPr marL="73152" marR="54864" marT="27432" marB="27432" anchor="ctr">
+                    <a:solidFill>
+                      <a:srgbClr val="FFFFFF"/>
+                    </a:solidFill>
+                  </a:tcPr>
+                </a:tc>
+                <a:tc>
+                  <a:txBody>
+                    <a:bodyPr wrap="square"/>
+                    <a:lstStyle/>
+                    <a:p>
+                      <a:r>
+                        <a:rPr sz="780" b="0">
+                          <a:solidFill>
+                            <a:srgbClr val="16181D"/>
+                          </a:solidFill>
+                          <a:latin typeface="Aptos"/>
+                        </a:rPr>
+                        <a:t>Automation strategy, contract tests, CI quality gates</a:t>
                       </a:r>
                     </a:p>
                   </a:txBody>
@@ -7228,8 +7538,8 @@
         </p:nvSpPr>
         <p:spPr>
           <a:xfrm>
-            <a:off x="6766560" y="1463040"/>
-            <a:ext cx="4846320" cy="274320"/>
+            <a:off x="640080" y="4892040"/>
+            <a:ext cx="10972800" cy="256032"/>
           </a:xfrm>
           <a:prstGeom prst="rect">
             <a:avLst/>
@@ -7248,7 +7558,7 @@
               </a:lnSpc>
             </a:pPr>
             <a:r>
-              <a:rPr sz="1100" b="1">
+              <a:rPr sz="1050" b="1">
                 <a:solidFill>
                   <a:srgbClr val="684E86"/>
                 </a:solidFill>
@@ -7267,8 +7577,8 @@
         </p:nvSpPr>
         <p:spPr>
           <a:xfrm>
-            <a:off x="6766560" y="1783080"/>
-            <a:ext cx="4846320" cy="685800"/>
+            <a:off x="640080" y="5212080"/>
+            <a:ext cx="2048255" cy="914400"/>
           </a:xfrm>
           <a:prstGeom prst="roundRect">
             <a:avLst>
@@ -7315,8 +7625,8 @@
         </p:nvSpPr>
         <p:spPr>
           <a:xfrm>
-            <a:off x="6766560" y="1783080"/>
-            <a:ext cx="4846320" cy="45720"/>
+            <a:off x="640080" y="5212080"/>
+            <a:ext cx="2048255" cy="45720"/>
           </a:xfrm>
           <a:prstGeom prst="rect">
             <a:avLst/>
@@ -7359,8 +7669,8 @@
         </p:nvSpPr>
         <p:spPr>
           <a:xfrm>
-            <a:off x="6903720" y="1856231"/>
-            <a:ext cx="4572000" cy="274320"/>
+            <a:off x="749808" y="5303520"/>
+            <a:ext cx="1828799" cy="274320"/>
           </a:xfrm>
           <a:prstGeom prst="rect">
             <a:avLst/>
@@ -7379,7 +7689,7 @@
               </a:lnSpc>
             </a:pPr>
             <a:r>
-              <a:rPr sz="1150" b="1">
+              <a:rPr sz="1050" b="1">
                 <a:solidFill>
                   <a:srgbClr val="684E86"/>
                 </a:solidFill>
@@ -7398,8 +7708,8 @@
         </p:nvSpPr>
         <p:spPr>
           <a:xfrm>
-            <a:off x="6903720" y="2112264"/>
-            <a:ext cx="4572000" cy="320040"/>
+            <a:off x="749808" y="5559552"/>
+            <a:ext cx="1828799" cy="502920"/>
           </a:xfrm>
           <a:prstGeom prst="rect">
             <a:avLst/>
@@ -7418,7 +7728,7 @@
               </a:lnSpc>
             </a:pPr>
             <a:r>
-              <a:rPr sz="930" b="0">
+              <a:rPr sz="819" b="0">
                 <a:solidFill>
                   <a:srgbClr val="5C6066"/>
                 </a:solidFill>
@@ -7437,8 +7747,8 @@
         </p:nvSpPr>
         <p:spPr>
           <a:xfrm>
-            <a:off x="6766560" y="2560320"/>
-            <a:ext cx="4846320" cy="685800"/>
+            <a:off x="2871215" y="5212080"/>
+            <a:ext cx="2048255" cy="914400"/>
           </a:xfrm>
           <a:prstGeom prst="roundRect">
             <a:avLst>
@@ -7485,8 +7795,8 @@
         </p:nvSpPr>
         <p:spPr>
           <a:xfrm>
-            <a:off x="6766560" y="2560320"/>
-            <a:ext cx="4846320" cy="45720"/>
+            <a:off x="2871215" y="5212080"/>
+            <a:ext cx="2048255" cy="45720"/>
           </a:xfrm>
           <a:prstGeom prst="rect">
             <a:avLst/>
@@ -7529,8 +7839,8 @@
         </p:nvSpPr>
         <p:spPr>
           <a:xfrm>
-            <a:off x="6903720" y="2633472"/>
-            <a:ext cx="4572000" cy="274320"/>
+            <a:off x="2980944" y="5303520"/>
+            <a:ext cx="1828799" cy="274320"/>
           </a:xfrm>
           <a:prstGeom prst="rect">
             <a:avLst/>
@@ -7549,7 +7859,7 @@
               </a:lnSpc>
             </a:pPr>
             <a:r>
-              <a:rPr sz="1150" b="1">
+              <a:rPr sz="1050" b="1">
                 <a:solidFill>
                   <a:srgbClr val="684E86"/>
                 </a:solidFill>
@@ -7568,8 +7878,8 @@
         </p:nvSpPr>
         <p:spPr>
           <a:xfrm>
-            <a:off x="6903720" y="2889503"/>
-            <a:ext cx="4572000" cy="320040"/>
+            <a:off x="2980944" y="5559552"/>
+            <a:ext cx="1828799" cy="502920"/>
           </a:xfrm>
           <a:prstGeom prst="rect">
             <a:avLst/>
@@ -7588,7 +7898,7 @@
               </a:lnSpc>
             </a:pPr>
             <a:r>
-              <a:rPr sz="930" b="0">
+              <a:rPr sz="819" b="0">
                 <a:solidFill>
                   <a:srgbClr val="5C6066"/>
                 </a:solidFill>
@@ -7607,8 +7917,8 @@
         </p:nvSpPr>
         <p:spPr>
           <a:xfrm>
-            <a:off x="6766560" y="3337560"/>
-            <a:ext cx="4846320" cy="685800"/>
+            <a:off x="5102352" y="5212080"/>
+            <a:ext cx="2048255" cy="914400"/>
           </a:xfrm>
           <a:prstGeom prst="roundRect">
             <a:avLst>
@@ -7655,8 +7965,8 @@
         </p:nvSpPr>
         <p:spPr>
           <a:xfrm>
-            <a:off x="6766560" y="3337560"/>
-            <a:ext cx="4846320" cy="45720"/>
+            <a:off x="5102352" y="5212080"/>
+            <a:ext cx="2048255" cy="45720"/>
           </a:xfrm>
           <a:prstGeom prst="rect">
             <a:avLst/>
@@ -7699,8 +8009,8 @@
         </p:nvSpPr>
         <p:spPr>
           <a:xfrm>
-            <a:off x="6903720" y="3410712"/>
-            <a:ext cx="4572000" cy="274320"/>
+            <a:off x="5212080" y="5303520"/>
+            <a:ext cx="1828799" cy="274320"/>
           </a:xfrm>
           <a:prstGeom prst="rect">
             <a:avLst/>
@@ -7719,7 +8029,7 @@
               </a:lnSpc>
             </a:pPr>
             <a:r>
-              <a:rPr sz="1150" b="1">
+              <a:rPr sz="1050" b="1">
                 <a:solidFill>
                   <a:srgbClr val="684E86"/>
                 </a:solidFill>
@@ -7738,8 +8048,8 @@
         </p:nvSpPr>
         <p:spPr>
           <a:xfrm>
-            <a:off x="6903720" y="3666744"/>
-            <a:ext cx="4572000" cy="320040"/>
+            <a:off x="5212080" y="5559552"/>
+            <a:ext cx="1828799" cy="502920"/>
           </a:xfrm>
           <a:prstGeom prst="rect">
             <a:avLst/>
@@ -7758,7 +8068,7 @@
               </a:lnSpc>
             </a:pPr>
             <a:r>
-              <a:rPr sz="930" b="0">
+              <a:rPr sz="819" b="0">
                 <a:solidFill>
                   <a:srgbClr val="5C6066"/>
                 </a:solidFill>
@@ -7777,8 +8087,8 @@
         </p:nvSpPr>
         <p:spPr>
           <a:xfrm>
-            <a:off x="6766560" y="4114800"/>
-            <a:ext cx="4846320" cy="685800"/>
+            <a:off x="7333488" y="5212080"/>
+            <a:ext cx="2048255" cy="914400"/>
           </a:xfrm>
           <a:prstGeom prst="roundRect">
             <a:avLst>
@@ -7825,8 +8135,8 @@
         </p:nvSpPr>
         <p:spPr>
           <a:xfrm>
-            <a:off x="6766560" y="4114800"/>
-            <a:ext cx="4846320" cy="45720"/>
+            <a:off x="7333488" y="5212080"/>
+            <a:ext cx="2048255" cy="45720"/>
           </a:xfrm>
           <a:prstGeom prst="rect">
             <a:avLst/>
@@ -7869,8 +8179,8 @@
         </p:nvSpPr>
         <p:spPr>
           <a:xfrm>
-            <a:off x="6903720" y="4187952"/>
-            <a:ext cx="4572000" cy="274320"/>
+            <a:off x="7443215" y="5303520"/>
+            <a:ext cx="1828799" cy="274320"/>
           </a:xfrm>
           <a:prstGeom prst="rect">
             <a:avLst/>
@@ -7889,7 +8199,7 @@
               </a:lnSpc>
             </a:pPr>
             <a:r>
-              <a:rPr sz="1150" b="1">
+              <a:rPr sz="1050" b="1">
                 <a:solidFill>
                   <a:srgbClr val="684E86"/>
                 </a:solidFill>
@@ -7908,8 +8218,8 @@
         </p:nvSpPr>
         <p:spPr>
           <a:xfrm>
-            <a:off x="6903720" y="4443984"/>
-            <a:ext cx="4572000" cy="320040"/>
+            <a:off x="7443215" y="5559552"/>
+            <a:ext cx="1828799" cy="502920"/>
           </a:xfrm>
           <a:prstGeom prst="rect">
             <a:avLst/>
@@ -7928,7 +8238,7 @@
               </a:lnSpc>
             </a:pPr>
             <a:r>
-              <a:rPr sz="930" b="0">
+              <a:rPr sz="819" b="0">
                 <a:solidFill>
                   <a:srgbClr val="5C6066"/>
                 </a:solidFill>
@@ -7947,8 +8257,8 @@
         </p:nvSpPr>
         <p:spPr>
           <a:xfrm>
-            <a:off x="6766560" y="4892040"/>
-            <a:ext cx="4846320" cy="685800"/>
+            <a:off x="9564624" y="5212080"/>
+            <a:ext cx="2048255" cy="914400"/>
           </a:xfrm>
           <a:prstGeom prst="roundRect">
             <a:avLst>
@@ -7995,8 +8305,8 @@
         </p:nvSpPr>
         <p:spPr>
           <a:xfrm>
-            <a:off x="6766560" y="4892040"/>
-            <a:ext cx="4846320" cy="45720"/>
+            <a:off x="9564624" y="5212080"/>
+            <a:ext cx="2048255" cy="45720"/>
           </a:xfrm>
           <a:prstGeom prst="rect">
             <a:avLst/>
@@ -8039,8 +8349,8 @@
         </p:nvSpPr>
         <p:spPr>
           <a:xfrm>
-            <a:off x="6903720" y="4965192"/>
-            <a:ext cx="4572000" cy="274320"/>
+            <a:off x="9674351" y="5303520"/>
+            <a:ext cx="1828799" cy="274320"/>
           </a:xfrm>
           <a:prstGeom prst="rect">
             <a:avLst/>
@@ -8059,7 +8369,7 @@
               </a:lnSpc>
             </a:pPr>
             <a:r>
-              <a:rPr sz="1150" b="1">
+              <a:rPr sz="1050" b="1">
                 <a:solidFill>
                   <a:srgbClr val="2E7D4F"/>
                 </a:solidFill>
@@ -8078,8 +8388,8 @@
         </p:nvSpPr>
         <p:spPr>
           <a:xfrm>
-            <a:off x="6903720" y="5221224"/>
-            <a:ext cx="4572000" cy="320040"/>
+            <a:off x="9674351" y="5559552"/>
+            <a:ext cx="1828799" cy="502920"/>
           </a:xfrm>
           <a:prstGeom prst="rect">
             <a:avLst/>
@@ -8098,7 +8408,7 @@
               </a:lnSpc>
             </a:pPr>
             <a:r>
-              <a:rPr sz="930" b="0">
+              <a:rPr sz="819" b="0">
                 <a:solidFill>
                   <a:srgbClr val="5C6066"/>
                 </a:solidFill>
@@ -19822,7 +20132,7 @@
                 </a:solidFill>
                 <a:latin typeface="Aptos"/>
               </a:rPr>
-              <a:t>Passes once, estate-wide</a:t>
+              <a:t>One-time · estate-wide</a:t>
             </a:r>
           </a:p>
         </p:txBody>
@@ -19987,7 +20297,7 @@
                 </a:solidFill>
                 <a:latin typeface="Aptos"/>
               </a:rPr>
-              <a:t>Passes per scope item</a:t>
+              <a:t>Per item · lightweight check</a:t>
             </a:r>
           </a:p>
         </p:txBody>
@@ -20152,7 +20462,7 @@
                 </a:solidFill>
                 <a:latin typeface="Aptos"/>
               </a:rPr>
-              <a:t>Passes per scope item</a:t>
+              <a:t>Per item · lightweight check</a:t>
             </a:r>
           </a:p>
         </p:txBody>
@@ -20230,7 +20540,7 @@
                 </a:solidFill>
                 <a:latin typeface="Aptos"/>
               </a:rPr>
-              <a:t>Are more gates coming? No. Three gate kinds — Gate 0 once (foundations), Gate 1 &amp; Gate 2 per item — every one Pandora-owned.</a:t>
+              <a:t>Only Gate 0 asks us to build something — so only Gate 0 gets its own slide (next). Gate 1 &amp; Gate 2 are the short per-item checks above; every gate is Pandora-owned and reversible.</a:t>
             </a:r>
           </a:p>
         </p:txBody>
@@ -20922,7 +21232,7 @@
                 </a:solidFill>
                 <a:latin typeface="Aptos"/>
               </a:rPr>
-              <a:t>04   READINESS FOUNDATIONS</a:t>
+              <a:t>04   GATE 0 IN DEPTH</a:t>
             </a:r>
           </a:p>
         </p:txBody>
@@ -20961,7 +21271,7 @@
                 </a:solidFill>
                 <a:latin typeface="Aptos"/>
               </a:rPr>
-              <a:t>Gate 0 — before anything agentic, four layers must hold</a:t>
+              <a:t>The one gate that needs building — four readiness layers that must hold</a:t>
             </a:r>
           </a:p>
         </p:txBody>
@@ -21044,7 +21354,7 @@
                 </a:solidFill>
                 <a:latin typeface="Aptos"/>
               </a:rPr>
-              <a:t>Lane 1 builds all four as a by-product of running the service well. Running as-is first is not a delay on the journey — it is its first leg. Agentic-first would not just have been ambitious; it would have been premature.</a:t>
+              <a:t>You just met the three gates; this is the one that needs building — which is why it, and only it, gets a slide of its own. Lane 1 builds all four layers as a by-product of running the service well, so running as-is first is not a delay on the journey — it is its first leg.</a:t>
             </a:r>
           </a:p>
         </p:txBody>
@@ -25392,8 +25702,8 @@
         </p:nvSpPr>
         <p:spPr>
           <a:xfrm>
-            <a:off x="822959" y="3429000"/>
-            <a:ext cx="3200400" cy="1463040"/>
+            <a:off x="822959" y="3383280"/>
+            <a:ext cx="3200400" cy="1371600"/>
           </a:xfrm>
           <a:prstGeom prst="rect">
             <a:avLst/>
@@ -25493,19 +25803,56 @@
       </p:sp>
       <p:sp>
         <p:nvSpPr>
-          <p:cNvPr id="13" name="Rounded Rectangle 12"/>
+          <p:cNvPr id="13" name="TextBox 12"/>
+          <p:cNvSpPr txBox="1"/>
+          <p:nvPr/>
+        </p:nvSpPr>
+        <p:spPr>
+          <a:xfrm>
+            <a:off x="822959" y="4892040"/>
+            <a:ext cx="3200400" cy="201168"/>
+          </a:xfrm>
+          <a:prstGeom prst="rect">
+            <a:avLst/>
+          </a:prstGeom>
+          <a:noFill/>
+        </p:spPr>
+        <p:txBody>
+          <a:bodyPr wrap="square">
+            <a:spAutoFit/>
+          </a:bodyPr>
+          <a:lstStyle/>
+          <a:p>
+            <a:pPr algn="l">
+              <a:lnSpc>
+                <a:spcPct val="106000"/>
+              </a:lnSpc>
+            </a:pPr>
+            <a:r>
+              <a:rPr sz="800" b="1">
+                <a:solidFill>
+                  <a:srgbClr val="5C6066"/>
+                </a:solidFill>
+                <a:latin typeface="Aptos"/>
+              </a:rPr>
+              <a:t>WHERE ITS EFFORT GOES TODAY</a:t>
+            </a:r>
+          </a:p>
+        </p:txBody>
+      </p:sp>
+      <p:sp>
+        <p:nvSpPr>
+          <p:cNvPr id="14" name="Rectangle 13"/>
           <p:cNvSpPr/>
           <p:nvPr/>
         </p:nvSpPr>
         <p:spPr>
           <a:xfrm>
-            <a:off x="822959" y="5257800"/>
-            <a:ext cx="2080260" cy="292608"/>
-          </a:xfrm>
-          <a:prstGeom prst="roundRect">
-            <a:avLst>
-              <a:gd name="adj" fmla="val 6000"/>
-            </a:avLst>
+            <a:off x="822959" y="5148072"/>
+            <a:ext cx="128016" cy="128016"/>
+          </a:xfrm>
+          <a:prstGeom prst="rect">
+            <a:avLst/>
           </a:prstGeom>
           <a:solidFill>
             <a:srgbClr val="35597B"/>
@@ -25539,14 +25886,14 @@
       </p:sp>
       <p:sp>
         <p:nvSpPr>
-          <p:cNvPr id="14" name="TextBox 13"/>
+          <p:cNvPr id="15" name="TextBox 14"/>
           <p:cNvSpPr txBox="1"/>
           <p:nvPr/>
         </p:nvSpPr>
         <p:spPr>
           <a:xfrm>
-            <a:off x="822959" y="5294376"/>
-            <a:ext cx="2080260" cy="219456"/>
+            <a:off x="1024127" y="5111496"/>
+            <a:ext cx="2926080" cy="201168"/>
           </a:xfrm>
           <a:prstGeom prst="rect">
             <a:avLst/>
@@ -25559,38 +25906,36 @@
           </a:bodyPr>
           <a:lstStyle/>
           <a:p>
-            <a:pPr algn="ctr">
+            <a:pPr algn="l">
               <a:lnSpc>
                 <a:spcPct val="106000"/>
               </a:lnSpc>
             </a:pPr>
             <a:r>
-              <a:rPr sz="900" b="1">
-                <a:solidFill>
-                  <a:srgbClr val="FFFFFF"/>
-                </a:solidFill>
-                <a:latin typeface="Aptos"/>
-              </a:rPr>
-              <a:t>Lane 1</a:t>
-            </a:r>
-          </a:p>
-        </p:txBody>
-      </p:sp>
-      <p:sp>
-        <p:nvSpPr>
-          <p:cNvPr id="15" name="Rounded Rectangle 14"/>
+              <a:rPr sz="950" b="1">
+                <a:solidFill>
+                  <a:srgbClr val="16181D"/>
+                </a:solidFill>
+                <a:latin typeface="Aptos"/>
+              </a:rPr>
+              <a:t>Lane 1 · Run &amp; Deliver  65%</a:t>
+            </a:r>
+          </a:p>
+        </p:txBody>
+      </p:sp>
+      <p:sp>
+        <p:nvSpPr>
+          <p:cNvPr id="16" name="Rectangle 15"/>
           <p:cNvSpPr/>
           <p:nvPr/>
         </p:nvSpPr>
         <p:spPr>
           <a:xfrm>
-            <a:off x="2903220" y="5257800"/>
-            <a:ext cx="1120140" cy="292608"/>
-          </a:xfrm>
-          <a:prstGeom prst="roundRect">
-            <a:avLst>
-              <a:gd name="adj" fmla="val 6000"/>
-            </a:avLst>
+            <a:off x="822959" y="5385816"/>
+            <a:ext cx="128016" cy="128016"/>
+          </a:xfrm>
+          <a:prstGeom prst="rect">
+            <a:avLst/>
           </a:prstGeom>
           <a:solidFill>
             <a:srgbClr val="C43B44"/>
@@ -25624,7 +25969,134 @@
       </p:sp>
       <p:sp>
         <p:nvSpPr>
-          <p:cNvPr id="16" name="Rounded Rectangle 15"/>
+          <p:cNvPr id="17" name="TextBox 16"/>
+          <p:cNvSpPr txBox="1"/>
+          <p:nvPr/>
+        </p:nvSpPr>
+        <p:spPr>
+          <a:xfrm>
+            <a:off x="1024127" y="5349240"/>
+            <a:ext cx="2926080" cy="201168"/>
+          </a:xfrm>
+          <a:prstGeom prst="rect">
+            <a:avLst/>
+          </a:prstGeom>
+          <a:noFill/>
+        </p:spPr>
+        <p:txBody>
+          <a:bodyPr wrap="square">
+            <a:spAutoFit/>
+          </a:bodyPr>
+          <a:lstStyle/>
+          <a:p>
+            <a:pPr algn="l">
+              <a:lnSpc>
+                <a:spcPct val="106000"/>
+              </a:lnSpc>
+            </a:pPr>
+            <a:r>
+              <a:rPr sz="950" b="1">
+                <a:solidFill>
+                  <a:srgbClr val="16181D"/>
+                </a:solidFill>
+                <a:latin typeface="Aptos"/>
+              </a:rPr>
+              <a:t>Lane 2 · Improve &amp; Evolve  35%</a:t>
+            </a:r>
+          </a:p>
+        </p:txBody>
+      </p:sp>
+      <p:sp>
+        <p:nvSpPr>
+          <p:cNvPr id="18" name="Rectangle 17"/>
+          <p:cNvSpPr/>
+          <p:nvPr/>
+        </p:nvSpPr>
+        <p:spPr>
+          <a:xfrm>
+            <a:off x="822959" y="5614416"/>
+            <a:ext cx="2080260" cy="146304"/>
+          </a:xfrm>
+          <a:prstGeom prst="rect">
+            <a:avLst/>
+          </a:prstGeom>
+          <a:solidFill>
+            <a:srgbClr val="35597B"/>
+          </a:solidFill>
+          <a:ln>
+            <a:noFill/>
+          </a:ln>
+          <a:effectLst/>
+        </p:spPr>
+        <p:style>
+          <a:lnRef idx="1">
+            <a:schemeClr val="accent1"/>
+          </a:lnRef>
+          <a:fillRef idx="3">
+            <a:schemeClr val="accent1"/>
+          </a:fillRef>
+          <a:effectRef idx="2">
+            <a:schemeClr val="accent1"/>
+          </a:effectRef>
+          <a:fontRef idx="minor">
+            <a:schemeClr val="lt1"/>
+          </a:fontRef>
+        </p:style>
+        <p:txBody>
+          <a:bodyPr rtlCol="0" anchor="ctr"/>
+          <a:lstStyle/>
+          <a:p>
+            <a:pPr algn="ctr"/>
+          </a:p>
+        </p:txBody>
+      </p:sp>
+      <p:sp>
+        <p:nvSpPr>
+          <p:cNvPr id="19" name="Rectangle 18"/>
+          <p:cNvSpPr/>
+          <p:nvPr/>
+        </p:nvSpPr>
+        <p:spPr>
+          <a:xfrm>
+            <a:off x="2903220" y="5614416"/>
+            <a:ext cx="1120140" cy="146304"/>
+          </a:xfrm>
+          <a:prstGeom prst="rect">
+            <a:avLst/>
+          </a:prstGeom>
+          <a:solidFill>
+            <a:srgbClr val="C43B44"/>
+          </a:solidFill>
+          <a:ln>
+            <a:noFill/>
+          </a:ln>
+          <a:effectLst/>
+        </p:spPr>
+        <p:style>
+          <a:lnRef idx="1">
+            <a:schemeClr val="accent1"/>
+          </a:lnRef>
+          <a:fillRef idx="3">
+            <a:schemeClr val="accent1"/>
+          </a:fillRef>
+          <a:effectRef idx="2">
+            <a:schemeClr val="accent1"/>
+          </a:effectRef>
+          <a:fontRef idx="minor">
+            <a:schemeClr val="lt1"/>
+          </a:fontRef>
+        </p:style>
+        <p:txBody>
+          <a:bodyPr rtlCol="0" anchor="ctr"/>
+          <a:lstStyle/>
+          <a:p>
+            <a:pPr algn="ctr"/>
+          </a:p>
+        </p:txBody>
+      </p:sp>
+      <p:sp>
+        <p:nvSpPr>
+          <p:cNvPr id="20" name="Rounded Rectangle 19"/>
           <p:cNvSpPr/>
           <p:nvPr/>
         </p:nvSpPr>
@@ -25672,7 +26144,7 @@
       </p:sp>
       <p:sp>
         <p:nvSpPr>
-          <p:cNvPr id="17" name="Rectangle 16"/>
+          <p:cNvPr id="21" name="Rectangle 20"/>
           <p:cNvSpPr/>
           <p:nvPr/>
         </p:nvSpPr>
@@ -25716,7 +26188,7 @@
       </p:sp>
       <p:sp>
         <p:nvSpPr>
-          <p:cNvPr id="18" name="TextBox 17"/>
+          <p:cNvPr id="22" name="TextBox 21"/>
           <p:cNvSpPr txBox="1"/>
           <p:nvPr/>
         </p:nvSpPr>
@@ -25755,7 +26227,7 @@
       </p:sp>
       <p:sp>
         <p:nvSpPr>
-          <p:cNvPr id="19" name="TextBox 18"/>
+          <p:cNvPr id="23" name="TextBox 22"/>
           <p:cNvSpPr txBox="1"/>
           <p:nvPr/>
         </p:nvSpPr>
@@ -25794,7 +26266,7 @@
       </p:sp>
       <p:sp>
         <p:nvSpPr>
-          <p:cNvPr id="20" name="TextBox 19"/>
+          <p:cNvPr id="24" name="TextBox 23"/>
           <p:cNvSpPr txBox="1"/>
           <p:nvPr/>
         </p:nvSpPr>
@@ -25833,14 +26305,14 @@
       </p:sp>
       <p:sp>
         <p:nvSpPr>
-          <p:cNvPr id="21" name="TextBox 20"/>
+          <p:cNvPr id="25" name="TextBox 24"/>
           <p:cNvSpPr txBox="1"/>
           <p:nvPr/>
         </p:nvSpPr>
         <p:spPr>
           <a:xfrm>
-            <a:off x="4526280" y="3429000"/>
-            <a:ext cx="3200400" cy="1463040"/>
+            <a:off x="4526280" y="3383280"/>
+            <a:ext cx="3200400" cy="1371600"/>
           </a:xfrm>
           <a:prstGeom prst="rect">
             <a:avLst/>
@@ -25940,19 +26412,56 @@
       </p:sp>
       <p:sp>
         <p:nvSpPr>
-          <p:cNvPr id="22" name="Rounded Rectangle 21"/>
+          <p:cNvPr id="26" name="TextBox 25"/>
+          <p:cNvSpPr txBox="1"/>
+          <p:nvPr/>
+        </p:nvSpPr>
+        <p:spPr>
+          <a:xfrm>
+            <a:off x="4526280" y="4892040"/>
+            <a:ext cx="3200400" cy="201168"/>
+          </a:xfrm>
+          <a:prstGeom prst="rect">
+            <a:avLst/>
+          </a:prstGeom>
+          <a:noFill/>
+        </p:spPr>
+        <p:txBody>
+          <a:bodyPr wrap="square">
+            <a:spAutoFit/>
+          </a:bodyPr>
+          <a:lstStyle/>
+          <a:p>
+            <a:pPr algn="l">
+              <a:lnSpc>
+                <a:spcPct val="106000"/>
+              </a:lnSpc>
+            </a:pPr>
+            <a:r>
+              <a:rPr sz="800" b="1">
+                <a:solidFill>
+                  <a:srgbClr val="5C6066"/>
+                </a:solidFill>
+                <a:latin typeface="Aptos"/>
+              </a:rPr>
+              <a:t>WHERE ITS EFFORT GOES TODAY</a:t>
+            </a:r>
+          </a:p>
+        </p:txBody>
+      </p:sp>
+      <p:sp>
+        <p:nvSpPr>
+          <p:cNvPr id="27" name="Rectangle 26"/>
           <p:cNvSpPr/>
           <p:nvPr/>
         </p:nvSpPr>
         <p:spPr>
           <a:xfrm>
-            <a:off x="4526280" y="5257800"/>
-            <a:ext cx="2560320" cy="292608"/>
-          </a:xfrm>
-          <a:prstGeom prst="roundRect">
-            <a:avLst>
-              <a:gd name="adj" fmla="val 6000"/>
-            </a:avLst>
+            <a:off x="4526280" y="5148072"/>
+            <a:ext cx="128016" cy="128016"/>
+          </a:xfrm>
+          <a:prstGeom prst="rect">
+            <a:avLst/>
           </a:prstGeom>
           <a:solidFill>
             <a:srgbClr val="35597B"/>
@@ -25986,14 +26495,14 @@
       </p:sp>
       <p:sp>
         <p:nvSpPr>
-          <p:cNvPr id="23" name="TextBox 22"/>
+          <p:cNvPr id="28" name="TextBox 27"/>
           <p:cNvSpPr txBox="1"/>
           <p:nvPr/>
         </p:nvSpPr>
         <p:spPr>
           <a:xfrm>
-            <a:off x="4526280" y="5294376"/>
-            <a:ext cx="2560320" cy="219456"/>
+            <a:off x="4727448" y="5111496"/>
+            <a:ext cx="2926080" cy="201168"/>
           </a:xfrm>
           <a:prstGeom prst="rect">
             <a:avLst/>
@@ -26006,38 +26515,36 @@
           </a:bodyPr>
           <a:lstStyle/>
           <a:p>
-            <a:pPr algn="ctr">
+            <a:pPr algn="l">
               <a:lnSpc>
                 <a:spcPct val="106000"/>
               </a:lnSpc>
             </a:pPr>
             <a:r>
-              <a:rPr sz="900" b="1">
-                <a:solidFill>
-                  <a:srgbClr val="FFFFFF"/>
-                </a:solidFill>
-                <a:latin typeface="Aptos"/>
-              </a:rPr>
-              <a:t>Lane 1</a:t>
-            </a:r>
-          </a:p>
-        </p:txBody>
-      </p:sp>
-      <p:sp>
-        <p:nvSpPr>
-          <p:cNvPr id="24" name="Rounded Rectangle 23"/>
+              <a:rPr sz="950" b="1">
+                <a:solidFill>
+                  <a:srgbClr val="16181D"/>
+                </a:solidFill>
+                <a:latin typeface="Aptos"/>
+              </a:rPr>
+              <a:t>Lane 1 · Run &amp; Deliver  80%</a:t>
+            </a:r>
+          </a:p>
+        </p:txBody>
+      </p:sp>
+      <p:sp>
+        <p:nvSpPr>
+          <p:cNvPr id="29" name="Rectangle 28"/>
           <p:cNvSpPr/>
           <p:nvPr/>
         </p:nvSpPr>
         <p:spPr>
           <a:xfrm>
-            <a:off x="7086600" y="5257800"/>
-            <a:ext cx="640080" cy="292608"/>
-          </a:xfrm>
-          <a:prstGeom prst="roundRect">
-            <a:avLst>
-              <a:gd name="adj" fmla="val 6000"/>
-            </a:avLst>
+            <a:off x="4526280" y="5385816"/>
+            <a:ext cx="128016" cy="128016"/>
+          </a:xfrm>
+          <a:prstGeom prst="rect">
+            <a:avLst/>
           </a:prstGeom>
           <a:solidFill>
             <a:srgbClr val="C43B44"/>
@@ -26071,7 +26578,134 @@
       </p:sp>
       <p:sp>
         <p:nvSpPr>
-          <p:cNvPr id="25" name="Rounded Rectangle 24"/>
+          <p:cNvPr id="30" name="TextBox 29"/>
+          <p:cNvSpPr txBox="1"/>
+          <p:nvPr/>
+        </p:nvSpPr>
+        <p:spPr>
+          <a:xfrm>
+            <a:off x="4727448" y="5349240"/>
+            <a:ext cx="2926080" cy="201168"/>
+          </a:xfrm>
+          <a:prstGeom prst="rect">
+            <a:avLst/>
+          </a:prstGeom>
+          <a:noFill/>
+        </p:spPr>
+        <p:txBody>
+          <a:bodyPr wrap="square">
+            <a:spAutoFit/>
+          </a:bodyPr>
+          <a:lstStyle/>
+          <a:p>
+            <a:pPr algn="l">
+              <a:lnSpc>
+                <a:spcPct val="106000"/>
+              </a:lnSpc>
+            </a:pPr>
+            <a:r>
+              <a:rPr sz="950" b="1">
+                <a:solidFill>
+                  <a:srgbClr val="16181D"/>
+                </a:solidFill>
+                <a:latin typeface="Aptos"/>
+              </a:rPr>
+              <a:t>Lane 2 · Improve &amp; Evolve  20%</a:t>
+            </a:r>
+          </a:p>
+        </p:txBody>
+      </p:sp>
+      <p:sp>
+        <p:nvSpPr>
+          <p:cNvPr id="31" name="Rectangle 30"/>
+          <p:cNvSpPr/>
+          <p:nvPr/>
+        </p:nvSpPr>
+        <p:spPr>
+          <a:xfrm>
+            <a:off x="4526280" y="5614416"/>
+            <a:ext cx="2560320" cy="146304"/>
+          </a:xfrm>
+          <a:prstGeom prst="rect">
+            <a:avLst/>
+          </a:prstGeom>
+          <a:solidFill>
+            <a:srgbClr val="35597B"/>
+          </a:solidFill>
+          <a:ln>
+            <a:noFill/>
+          </a:ln>
+          <a:effectLst/>
+        </p:spPr>
+        <p:style>
+          <a:lnRef idx="1">
+            <a:schemeClr val="accent1"/>
+          </a:lnRef>
+          <a:fillRef idx="3">
+            <a:schemeClr val="accent1"/>
+          </a:fillRef>
+          <a:effectRef idx="2">
+            <a:schemeClr val="accent1"/>
+          </a:effectRef>
+          <a:fontRef idx="minor">
+            <a:schemeClr val="lt1"/>
+          </a:fontRef>
+        </p:style>
+        <p:txBody>
+          <a:bodyPr rtlCol="0" anchor="ctr"/>
+          <a:lstStyle/>
+          <a:p>
+            <a:pPr algn="ctr"/>
+          </a:p>
+        </p:txBody>
+      </p:sp>
+      <p:sp>
+        <p:nvSpPr>
+          <p:cNvPr id="32" name="Rectangle 31"/>
+          <p:cNvSpPr/>
+          <p:nvPr/>
+        </p:nvSpPr>
+        <p:spPr>
+          <a:xfrm>
+            <a:off x="7086600" y="5614416"/>
+            <a:ext cx="640080" cy="146304"/>
+          </a:xfrm>
+          <a:prstGeom prst="rect">
+            <a:avLst/>
+          </a:prstGeom>
+          <a:solidFill>
+            <a:srgbClr val="C43B44"/>
+          </a:solidFill>
+          <a:ln>
+            <a:noFill/>
+          </a:ln>
+          <a:effectLst/>
+        </p:spPr>
+        <p:style>
+          <a:lnRef idx="1">
+            <a:schemeClr val="accent1"/>
+          </a:lnRef>
+          <a:fillRef idx="3">
+            <a:schemeClr val="accent1"/>
+          </a:fillRef>
+          <a:effectRef idx="2">
+            <a:schemeClr val="accent1"/>
+          </a:effectRef>
+          <a:fontRef idx="minor">
+            <a:schemeClr val="lt1"/>
+          </a:fontRef>
+        </p:style>
+        <p:txBody>
+          <a:bodyPr rtlCol="0" anchor="ctr"/>
+          <a:lstStyle/>
+          <a:p>
+            <a:pPr algn="ctr"/>
+          </a:p>
+        </p:txBody>
+      </p:sp>
+      <p:sp>
+        <p:nvSpPr>
+          <p:cNvPr id="33" name="Rounded Rectangle 32"/>
           <p:cNvSpPr/>
           <p:nvPr/>
         </p:nvSpPr>
@@ -26119,7 +26753,7 @@
       </p:sp>
       <p:sp>
         <p:nvSpPr>
-          <p:cNvPr id="26" name="Rectangle 25"/>
+          <p:cNvPr id="34" name="Rectangle 33"/>
           <p:cNvSpPr/>
           <p:nvPr/>
         </p:nvSpPr>
@@ -26163,7 +26797,7 @@
       </p:sp>
       <p:sp>
         <p:nvSpPr>
-          <p:cNvPr id="27" name="TextBox 26"/>
+          <p:cNvPr id="35" name="TextBox 34"/>
           <p:cNvSpPr txBox="1"/>
           <p:nvPr/>
         </p:nvSpPr>
@@ -26202,7 +26836,7 @@
       </p:sp>
       <p:sp>
         <p:nvSpPr>
-          <p:cNvPr id="28" name="TextBox 27"/>
+          <p:cNvPr id="36" name="TextBox 35"/>
           <p:cNvSpPr txBox="1"/>
           <p:nvPr/>
         </p:nvSpPr>
@@ -26241,7 +26875,7 @@
       </p:sp>
       <p:sp>
         <p:nvSpPr>
-          <p:cNvPr id="29" name="TextBox 28"/>
+          <p:cNvPr id="37" name="TextBox 36"/>
           <p:cNvSpPr txBox="1"/>
           <p:nvPr/>
         </p:nvSpPr>
@@ -26280,14 +26914,14 @@
       </p:sp>
       <p:sp>
         <p:nvSpPr>
-          <p:cNvPr id="30" name="TextBox 29"/>
+          <p:cNvPr id="38" name="TextBox 37"/>
           <p:cNvSpPr txBox="1"/>
           <p:nvPr/>
         </p:nvSpPr>
         <p:spPr>
           <a:xfrm>
-            <a:off x="8229599" y="3429000"/>
-            <a:ext cx="3200400" cy="1463040"/>
+            <a:off x="8229599" y="3383280"/>
+            <a:ext cx="3200400" cy="1371600"/>
           </a:xfrm>
           <a:prstGeom prst="rect">
             <a:avLst/>
@@ -26387,19 +27021,56 @@
       </p:sp>
       <p:sp>
         <p:nvSpPr>
-          <p:cNvPr id="31" name="Rounded Rectangle 30"/>
+          <p:cNvPr id="39" name="TextBox 38"/>
+          <p:cNvSpPr txBox="1"/>
+          <p:nvPr/>
+        </p:nvSpPr>
+        <p:spPr>
+          <a:xfrm>
+            <a:off x="8229599" y="4892040"/>
+            <a:ext cx="3200400" cy="201168"/>
+          </a:xfrm>
+          <a:prstGeom prst="rect">
+            <a:avLst/>
+          </a:prstGeom>
+          <a:noFill/>
+        </p:spPr>
+        <p:txBody>
+          <a:bodyPr wrap="square">
+            <a:spAutoFit/>
+          </a:bodyPr>
+          <a:lstStyle/>
+          <a:p>
+            <a:pPr algn="l">
+              <a:lnSpc>
+                <a:spcPct val="106000"/>
+              </a:lnSpc>
+            </a:pPr>
+            <a:r>
+              <a:rPr sz="800" b="1">
+                <a:solidFill>
+                  <a:srgbClr val="5C6066"/>
+                </a:solidFill>
+                <a:latin typeface="Aptos"/>
+              </a:rPr>
+              <a:t>WHERE ITS EFFORT GOES TODAY</a:t>
+            </a:r>
+          </a:p>
+        </p:txBody>
+      </p:sp>
+      <p:sp>
+        <p:nvSpPr>
+          <p:cNvPr id="40" name="Rectangle 39"/>
           <p:cNvSpPr/>
           <p:nvPr/>
         </p:nvSpPr>
         <p:spPr>
           <a:xfrm>
-            <a:off x="8229599" y="5257800"/>
-            <a:ext cx="2816352" cy="292608"/>
-          </a:xfrm>
-          <a:prstGeom prst="roundRect">
-            <a:avLst>
-              <a:gd name="adj" fmla="val 6000"/>
-            </a:avLst>
+            <a:off x="8229599" y="5148072"/>
+            <a:ext cx="128016" cy="128016"/>
+          </a:xfrm>
+          <a:prstGeom prst="rect">
+            <a:avLst/>
           </a:prstGeom>
           <a:solidFill>
             <a:srgbClr val="35597B"/>
@@ -26433,14 +27104,14 @@
       </p:sp>
       <p:sp>
         <p:nvSpPr>
-          <p:cNvPr id="32" name="TextBox 31"/>
+          <p:cNvPr id="41" name="TextBox 40"/>
           <p:cNvSpPr txBox="1"/>
           <p:nvPr/>
         </p:nvSpPr>
         <p:spPr>
           <a:xfrm>
-            <a:off x="8229599" y="5294376"/>
-            <a:ext cx="2816352" cy="219456"/>
+            <a:off x="8430767" y="5111496"/>
+            <a:ext cx="2926080" cy="201168"/>
           </a:xfrm>
           <a:prstGeom prst="rect">
             <a:avLst/>
@@ -26453,38 +27124,36 @@
           </a:bodyPr>
           <a:lstStyle/>
           <a:p>
-            <a:pPr algn="ctr">
+            <a:pPr algn="l">
               <a:lnSpc>
                 <a:spcPct val="106000"/>
               </a:lnSpc>
             </a:pPr>
             <a:r>
-              <a:rPr sz="900" b="1">
-                <a:solidFill>
-                  <a:srgbClr val="FFFFFF"/>
-                </a:solidFill>
-                <a:latin typeface="Aptos"/>
-              </a:rPr>
-              <a:t>Lane 1</a:t>
-            </a:r>
-          </a:p>
-        </p:txBody>
-      </p:sp>
-      <p:sp>
-        <p:nvSpPr>
-          <p:cNvPr id="33" name="Rounded Rectangle 32"/>
+              <a:rPr sz="950" b="1">
+                <a:solidFill>
+                  <a:srgbClr val="16181D"/>
+                </a:solidFill>
+                <a:latin typeface="Aptos"/>
+              </a:rPr>
+              <a:t>Lane 1 · Run &amp; Deliver  88%</a:t>
+            </a:r>
+          </a:p>
+        </p:txBody>
+      </p:sp>
+      <p:sp>
+        <p:nvSpPr>
+          <p:cNvPr id="42" name="Rectangle 41"/>
           <p:cNvSpPr/>
           <p:nvPr/>
         </p:nvSpPr>
         <p:spPr>
           <a:xfrm>
-            <a:off x="11045951" y="5257800"/>
-            <a:ext cx="384048" cy="292608"/>
-          </a:xfrm>
-          <a:prstGeom prst="roundRect">
-            <a:avLst>
-              <a:gd name="adj" fmla="val 6000"/>
-            </a:avLst>
+            <a:off x="8229599" y="5385816"/>
+            <a:ext cx="128016" cy="128016"/>
+          </a:xfrm>
+          <a:prstGeom prst="rect">
+            <a:avLst/>
           </a:prstGeom>
           <a:solidFill>
             <a:srgbClr val="C43B44"/>
@@ -26518,14 +27187,14 @@
       </p:sp>
       <p:sp>
         <p:nvSpPr>
-          <p:cNvPr id="34" name="TextBox 33"/>
+          <p:cNvPr id="43" name="TextBox 42"/>
           <p:cNvSpPr txBox="1"/>
           <p:nvPr/>
         </p:nvSpPr>
         <p:spPr>
           <a:xfrm>
-            <a:off x="640080" y="6400800"/>
-            <a:ext cx="10972800" cy="320040"/>
+            <a:off x="8430767" y="5349240"/>
+            <a:ext cx="2926080" cy="201168"/>
           </a:xfrm>
           <a:prstGeom prst="rect">
             <a:avLst/>
@@ -26544,13 +27213,140 @@
               </a:lnSpc>
             </a:pPr>
             <a:r>
+              <a:rPr sz="950" b="1">
+                <a:solidFill>
+                  <a:srgbClr val="16181D"/>
+                </a:solidFill>
+                <a:latin typeface="Aptos"/>
+              </a:rPr>
+              <a:t>Lane 2 · Improve &amp; Evolve  12%</a:t>
+            </a:r>
+          </a:p>
+        </p:txBody>
+      </p:sp>
+      <p:sp>
+        <p:nvSpPr>
+          <p:cNvPr id="44" name="Rectangle 43"/>
+          <p:cNvSpPr/>
+          <p:nvPr/>
+        </p:nvSpPr>
+        <p:spPr>
+          <a:xfrm>
+            <a:off x="8229599" y="5614416"/>
+            <a:ext cx="2816352" cy="146304"/>
+          </a:xfrm>
+          <a:prstGeom prst="rect">
+            <a:avLst/>
+          </a:prstGeom>
+          <a:solidFill>
+            <a:srgbClr val="35597B"/>
+          </a:solidFill>
+          <a:ln>
+            <a:noFill/>
+          </a:ln>
+          <a:effectLst/>
+        </p:spPr>
+        <p:style>
+          <a:lnRef idx="1">
+            <a:schemeClr val="accent1"/>
+          </a:lnRef>
+          <a:fillRef idx="3">
+            <a:schemeClr val="accent1"/>
+          </a:fillRef>
+          <a:effectRef idx="2">
+            <a:schemeClr val="accent1"/>
+          </a:effectRef>
+          <a:fontRef idx="minor">
+            <a:schemeClr val="lt1"/>
+          </a:fontRef>
+        </p:style>
+        <p:txBody>
+          <a:bodyPr rtlCol="0" anchor="ctr"/>
+          <a:lstStyle/>
+          <a:p>
+            <a:pPr algn="ctr"/>
+          </a:p>
+        </p:txBody>
+      </p:sp>
+      <p:sp>
+        <p:nvSpPr>
+          <p:cNvPr id="45" name="Rectangle 44"/>
+          <p:cNvSpPr/>
+          <p:nvPr/>
+        </p:nvSpPr>
+        <p:spPr>
+          <a:xfrm>
+            <a:off x="11045951" y="5614416"/>
+            <a:ext cx="384048" cy="146304"/>
+          </a:xfrm>
+          <a:prstGeom prst="rect">
+            <a:avLst/>
+          </a:prstGeom>
+          <a:solidFill>
+            <a:srgbClr val="C43B44"/>
+          </a:solidFill>
+          <a:ln>
+            <a:noFill/>
+          </a:ln>
+          <a:effectLst/>
+        </p:spPr>
+        <p:style>
+          <a:lnRef idx="1">
+            <a:schemeClr val="accent1"/>
+          </a:lnRef>
+          <a:fillRef idx="3">
+            <a:schemeClr val="accent1"/>
+          </a:fillRef>
+          <a:effectRef idx="2">
+            <a:schemeClr val="accent1"/>
+          </a:effectRef>
+          <a:fontRef idx="minor">
+            <a:schemeClr val="lt1"/>
+          </a:fontRef>
+        </p:style>
+        <p:txBody>
+          <a:bodyPr rtlCol="0" anchor="ctr"/>
+          <a:lstStyle/>
+          <a:p>
+            <a:pPr algn="ctr"/>
+          </a:p>
+        </p:txBody>
+      </p:sp>
+      <p:sp>
+        <p:nvSpPr>
+          <p:cNvPr id="46" name="TextBox 45"/>
+          <p:cNvSpPr txBox="1"/>
+          <p:nvPr/>
+        </p:nvSpPr>
+        <p:spPr>
+          <a:xfrm>
+            <a:off x="640080" y="6400800"/>
+            <a:ext cx="10972800" cy="320040"/>
+          </a:xfrm>
+          <a:prstGeom prst="rect">
+            <a:avLst/>
+          </a:prstGeom>
+          <a:noFill/>
+        </p:spPr>
+        <p:txBody>
+          <a:bodyPr wrap="square">
+            <a:spAutoFit/>
+          </a:bodyPr>
+          <a:lstStyle/>
+          <a:p>
+            <a:pPr algn="l">
+              <a:lnSpc>
+                <a:spcPct val="106000"/>
+              </a:lnSpc>
+            </a:pPr>
+            <a:r>
               <a:rPr sz="1200" b="1">
                 <a:solidFill>
                   <a:srgbClr val="2E7D4F"/>
                 </a:solidFill>
                 <a:latin typeface="Aptos"/>
               </a:rPr>
-              <a:t>Every location is mostly Lane 1; the thin Lane 2 sliver is the same people, and grows only as you turn dials.</a:t>
+              <a:t>Read every bar the same way: each location is mostly Lane 1 today. The coral Lane 2 slice is not a second team — it is the same people doing enablement, and it grows only as you turn dials.</a:t>
             </a:r>
           </a:p>
         </p:txBody>

--- a/docs/Alternative Approach - Summary.pptx
+++ b/docs/Alternative Approach - Summary.pptx
@@ -3771,8 +3771,8 @@
         </p:nvSpPr>
         <p:spPr>
           <a:xfrm>
-            <a:off x="2926080" y="2084831"/>
-            <a:ext cx="6400800" cy="228600"/>
+            <a:off x="2926080" y="2066543"/>
+            <a:ext cx="6400800" cy="201168"/>
           </a:xfrm>
           <a:prstGeom prst="rect">
             <a:avLst/>
@@ -3791,13 +3791,13 @@
               </a:lnSpc>
             </a:pPr>
             <a:r>
-              <a:rPr sz="1000" b="1">
+              <a:rPr sz="950" b="1">
                 <a:solidFill>
                   <a:srgbClr val="5C6066"/>
                 </a:solidFill>
                 <a:latin typeface="Aptos"/>
               </a:rPr>
-              <a:t>↕ pairs 1:1</a:t>
+              <a:t>↕ pairs 1:1 — one accountable line</a:t>
             </a:r>
           </a:p>
         </p:txBody>
@@ -3810,8 +3810,8 @@
         </p:nvSpPr>
         <p:spPr>
           <a:xfrm>
-            <a:off x="3566160" y="2331720"/>
-            <a:ext cx="5120640" cy="566928"/>
+            <a:off x="3566160" y="2286000"/>
+            <a:ext cx="5120640" cy="502920"/>
           </a:xfrm>
           <a:prstGeom prst="roundRect">
             <a:avLst>
@@ -3858,7 +3858,7 @@
         </p:nvSpPr>
         <p:spPr>
           <a:xfrm>
-            <a:off x="3566160" y="2404872"/>
+            <a:off x="3566160" y="2350008"/>
             <a:ext cx="5120640" cy="365760"/>
           </a:xfrm>
           <a:prstGeom prst="rect">
@@ -3897,8 +3897,96 @@
         </p:nvSpPr>
         <p:spPr>
           <a:xfrm>
-            <a:off x="640080" y="3108960"/>
-            <a:ext cx="3520440" cy="1371600"/>
+            <a:off x="640080" y="2907792"/>
+            <a:ext cx="10835640" cy="310896"/>
+          </a:xfrm>
+          <a:prstGeom prst="roundRect">
+            <a:avLst>
+              <a:gd name="adj" fmla="val 6000"/>
+            </a:avLst>
+          </a:prstGeom>
+          <a:solidFill>
+            <a:srgbClr val="EDF1F6"/>
+          </a:solidFill>
+          <a:ln w="15240">
+            <a:solidFill>
+              <a:srgbClr val="35597B"/>
+            </a:solidFill>
+            <a:prstDash val="sysDot"/>
+          </a:ln>
+          <a:effectLst/>
+        </p:spPr>
+        <p:style>
+          <a:lnRef idx="1">
+            <a:schemeClr val="accent1"/>
+          </a:lnRef>
+          <a:fillRef idx="3">
+            <a:schemeClr val="accent1"/>
+          </a:fillRef>
+          <a:effectRef idx="2">
+            <a:schemeClr val="accent1"/>
+          </a:effectRef>
+          <a:fontRef idx="minor">
+            <a:schemeClr val="lt1"/>
+          </a:fontRef>
+        </p:style>
+        <p:txBody>
+          <a:bodyPr rtlCol="0" anchor="ctr"/>
+          <a:lstStyle/>
+          <a:p>
+            <a:pPr algn="ctr"/>
+          </a:p>
+        </p:txBody>
+      </p:sp>
+      <p:sp>
+        <p:nvSpPr>
+          <p:cNvPr id="12" name="TextBox 11"/>
+          <p:cNvSpPr txBox="1"/>
+          <p:nvPr/>
+        </p:nvSpPr>
+        <p:spPr>
+          <a:xfrm>
+            <a:off x="640080" y="2962656"/>
+            <a:ext cx="10835640" cy="219456"/>
+          </a:xfrm>
+          <a:prstGeom prst="rect">
+            <a:avLst/>
+          </a:prstGeom>
+          <a:noFill/>
+        </p:spPr>
+        <p:txBody>
+          <a:bodyPr wrap="square">
+            <a:spAutoFit/>
+          </a:bodyPr>
+          <a:lstStyle/>
+          <a:p>
+            <a:pPr algn="ctr">
+              <a:lnSpc>
+                <a:spcPct val="106000"/>
+              </a:lnSpc>
+            </a:pPr>
+            <a:r>
+              <a:rPr sz="1050" b="1">
+                <a:solidFill>
+                  <a:srgbClr val="35597B"/>
+                </a:solidFill>
+                <a:latin typeface="Aptos"/>
+              </a:rPr>
+              <a:t>Pandora's direct line to every track lead — transparent &amp; encouraged</a:t>
+            </a:r>
+          </a:p>
+        </p:txBody>
+      </p:sp>
+      <p:sp>
+        <p:nvSpPr>
+          <p:cNvPr id="13" name="Rounded Rectangle 12"/>
+          <p:cNvSpPr/>
+          <p:nvPr/>
+        </p:nvSpPr>
+        <p:spPr>
+          <a:xfrm>
+            <a:off x="640080" y="3310128"/>
+            <a:ext cx="3520440" cy="1298448"/>
           </a:xfrm>
           <a:prstGeom prst="roundRect">
             <a:avLst>
@@ -3939,13 +4027,13 @@
       </p:sp>
       <p:sp>
         <p:nvSpPr>
-          <p:cNvPr id="12" name="TextBox 11"/>
+          <p:cNvPr id="14" name="TextBox 13"/>
           <p:cNvSpPr txBox="1"/>
           <p:nvPr/>
         </p:nvSpPr>
         <p:spPr>
           <a:xfrm>
-            <a:off x="777240" y="3200400"/>
+            <a:off x="777240" y="3383280"/>
             <a:ext cx="3246120" cy="274320"/>
           </a:xfrm>
           <a:prstGeom prst="rect">
@@ -3978,13 +4066,13 @@
       </p:sp>
       <p:sp>
         <p:nvSpPr>
-          <p:cNvPr id="13" name="Rounded Rectangle 12"/>
+          <p:cNvPr id="15" name="Rounded Rectangle 14"/>
           <p:cNvSpPr/>
           <p:nvPr/>
         </p:nvSpPr>
         <p:spPr>
           <a:xfrm>
-            <a:off x="777240" y="3566160"/>
+            <a:off x="777240" y="3712463"/>
             <a:ext cx="3246120" cy="402336"/>
           </a:xfrm>
           <a:prstGeom prst="roundRect">
@@ -4024,13 +4112,13 @@
       </p:sp>
       <p:sp>
         <p:nvSpPr>
-          <p:cNvPr id="14" name="TextBox 13"/>
+          <p:cNvPr id="16" name="TextBox 15"/>
           <p:cNvSpPr txBox="1"/>
           <p:nvPr/>
         </p:nvSpPr>
         <p:spPr>
           <a:xfrm>
-            <a:off x="868680" y="3621024"/>
+            <a:off x="868680" y="3767328"/>
             <a:ext cx="3108960" cy="320040"/>
           </a:xfrm>
           <a:prstGeom prst="rect">
@@ -4063,13 +4151,13 @@
       </p:sp>
       <p:sp>
         <p:nvSpPr>
-          <p:cNvPr id="15" name="Rounded Rectangle 14"/>
+          <p:cNvPr id="17" name="Rounded Rectangle 16"/>
           <p:cNvSpPr/>
           <p:nvPr/>
         </p:nvSpPr>
         <p:spPr>
           <a:xfrm>
-            <a:off x="777240" y="4023360"/>
+            <a:off x="777240" y="4151376"/>
             <a:ext cx="3246120" cy="402336"/>
           </a:xfrm>
           <a:prstGeom prst="roundRect">
@@ -4109,13 +4197,13 @@
       </p:sp>
       <p:sp>
         <p:nvSpPr>
-          <p:cNvPr id="16" name="TextBox 15"/>
+          <p:cNvPr id="18" name="TextBox 17"/>
           <p:cNvSpPr txBox="1"/>
           <p:nvPr/>
         </p:nvSpPr>
         <p:spPr>
           <a:xfrm>
-            <a:off x="868680" y="4078224"/>
+            <a:off x="868680" y="4206240"/>
             <a:ext cx="3108960" cy="320040"/>
           </a:xfrm>
           <a:prstGeom prst="rect">
@@ -4148,14 +4236,14 @@
       </p:sp>
       <p:sp>
         <p:nvSpPr>
-          <p:cNvPr id="17" name="Rounded Rectangle 16"/>
+          <p:cNvPr id="19" name="Rounded Rectangle 18"/>
           <p:cNvSpPr/>
           <p:nvPr/>
         </p:nvSpPr>
         <p:spPr>
           <a:xfrm>
-            <a:off x="4343400" y="3108960"/>
-            <a:ext cx="3520440" cy="1371600"/>
+            <a:off x="4343400" y="3310128"/>
+            <a:ext cx="3520440" cy="1298448"/>
           </a:xfrm>
           <a:prstGeom prst="roundRect">
             <a:avLst>
@@ -4196,13 +4284,13 @@
       </p:sp>
       <p:sp>
         <p:nvSpPr>
-          <p:cNvPr id="18" name="TextBox 17"/>
+          <p:cNvPr id="20" name="TextBox 19"/>
           <p:cNvSpPr txBox="1"/>
           <p:nvPr/>
         </p:nvSpPr>
         <p:spPr>
           <a:xfrm>
-            <a:off x="4480560" y="3200400"/>
+            <a:off x="4480560" y="3383280"/>
             <a:ext cx="3246120" cy="274320"/>
           </a:xfrm>
           <a:prstGeom prst="rect">
@@ -4235,13 +4323,13 @@
       </p:sp>
       <p:sp>
         <p:nvSpPr>
-          <p:cNvPr id="19" name="Rounded Rectangle 18"/>
+          <p:cNvPr id="21" name="Rounded Rectangle 20"/>
           <p:cNvSpPr/>
           <p:nvPr/>
         </p:nvSpPr>
         <p:spPr>
           <a:xfrm>
-            <a:off x="4480560" y="3566160"/>
+            <a:off x="4480560" y="3712463"/>
             <a:ext cx="3246120" cy="402336"/>
           </a:xfrm>
           <a:prstGeom prst="roundRect">
@@ -4281,13 +4369,13 @@
       </p:sp>
       <p:sp>
         <p:nvSpPr>
-          <p:cNvPr id="20" name="TextBox 19"/>
+          <p:cNvPr id="22" name="TextBox 21"/>
           <p:cNvSpPr txBox="1"/>
           <p:nvPr/>
         </p:nvSpPr>
         <p:spPr>
           <a:xfrm>
-            <a:off x="4572000" y="3621024"/>
+            <a:off x="4572000" y="3767328"/>
             <a:ext cx="3108960" cy="320040"/>
           </a:xfrm>
           <a:prstGeom prst="rect">
@@ -4320,13 +4408,13 @@
       </p:sp>
       <p:sp>
         <p:nvSpPr>
-          <p:cNvPr id="21" name="Rounded Rectangle 20"/>
+          <p:cNvPr id="23" name="Rounded Rectangle 22"/>
           <p:cNvSpPr/>
           <p:nvPr/>
         </p:nvSpPr>
         <p:spPr>
           <a:xfrm>
-            <a:off x="4480560" y="4023360"/>
+            <a:off x="4480560" y="4151376"/>
             <a:ext cx="3246120" cy="402336"/>
           </a:xfrm>
           <a:prstGeom prst="roundRect">
@@ -4366,13 +4454,13 @@
       </p:sp>
       <p:sp>
         <p:nvSpPr>
-          <p:cNvPr id="22" name="TextBox 21"/>
+          <p:cNvPr id="24" name="TextBox 23"/>
           <p:cNvSpPr txBox="1"/>
           <p:nvPr/>
         </p:nvSpPr>
         <p:spPr>
           <a:xfrm>
-            <a:off x="4572000" y="4078224"/>
+            <a:off x="4572000" y="4206240"/>
             <a:ext cx="3108960" cy="320040"/>
           </a:xfrm>
           <a:prstGeom prst="rect">
@@ -4405,14 +4493,14 @@
       </p:sp>
       <p:sp>
         <p:nvSpPr>
-          <p:cNvPr id="23" name="Rounded Rectangle 22"/>
+          <p:cNvPr id="25" name="Rounded Rectangle 24"/>
           <p:cNvSpPr/>
           <p:nvPr/>
         </p:nvSpPr>
         <p:spPr>
           <a:xfrm>
-            <a:off x="8046719" y="3108960"/>
-            <a:ext cx="3520440" cy="1371600"/>
+            <a:off x="8046719" y="3310128"/>
+            <a:ext cx="3520440" cy="1298448"/>
           </a:xfrm>
           <a:prstGeom prst="roundRect">
             <a:avLst>
@@ -4453,13 +4541,13 @@
       </p:sp>
       <p:sp>
         <p:nvSpPr>
-          <p:cNvPr id="24" name="TextBox 23"/>
+          <p:cNvPr id="26" name="TextBox 25"/>
           <p:cNvSpPr txBox="1"/>
           <p:nvPr/>
         </p:nvSpPr>
         <p:spPr>
           <a:xfrm>
-            <a:off x="8183879" y="3200400"/>
+            <a:off x="8183879" y="3383280"/>
             <a:ext cx="3246120" cy="274320"/>
           </a:xfrm>
           <a:prstGeom prst="rect">
@@ -4492,13 +4580,13 @@
       </p:sp>
       <p:sp>
         <p:nvSpPr>
-          <p:cNvPr id="25" name="Rounded Rectangle 24"/>
+          <p:cNvPr id="27" name="Rounded Rectangle 26"/>
           <p:cNvSpPr/>
           <p:nvPr/>
         </p:nvSpPr>
         <p:spPr>
           <a:xfrm>
-            <a:off x="8183879" y="3566160"/>
+            <a:off x="8183879" y="3712463"/>
             <a:ext cx="3246120" cy="402336"/>
           </a:xfrm>
           <a:prstGeom prst="roundRect">
@@ -4538,13 +4626,13 @@
       </p:sp>
       <p:sp>
         <p:nvSpPr>
-          <p:cNvPr id="26" name="TextBox 25"/>
+          <p:cNvPr id="28" name="TextBox 27"/>
           <p:cNvSpPr txBox="1"/>
           <p:nvPr/>
         </p:nvSpPr>
         <p:spPr>
           <a:xfrm>
-            <a:off x="8275319" y="3621024"/>
+            <a:off x="8275319" y="3767328"/>
             <a:ext cx="3108960" cy="320040"/>
           </a:xfrm>
           <a:prstGeom prst="rect">
@@ -4577,13 +4665,13 @@
       </p:sp>
       <p:sp>
         <p:nvSpPr>
-          <p:cNvPr id="27" name="Rounded Rectangle 26"/>
+          <p:cNvPr id="29" name="Rounded Rectangle 28"/>
           <p:cNvSpPr/>
           <p:nvPr/>
         </p:nvSpPr>
         <p:spPr>
           <a:xfrm>
-            <a:off x="8183879" y="4023360"/>
+            <a:off x="8183879" y="4151376"/>
             <a:ext cx="3246120" cy="402336"/>
           </a:xfrm>
           <a:prstGeom prst="roundRect">
@@ -4623,13 +4711,13 @@
       </p:sp>
       <p:sp>
         <p:nvSpPr>
-          <p:cNvPr id="28" name="TextBox 27"/>
+          <p:cNvPr id="30" name="TextBox 29"/>
           <p:cNvSpPr txBox="1"/>
           <p:nvPr/>
         </p:nvSpPr>
         <p:spPr>
           <a:xfrm>
-            <a:off x="8275319" y="4078224"/>
+            <a:off x="8275319" y="4206240"/>
             <a:ext cx="3108960" cy="320040"/>
           </a:xfrm>
           <a:prstGeom prst="rect">
@@ -4662,7 +4750,7 @@
       </p:sp>
       <p:sp>
         <p:nvSpPr>
-          <p:cNvPr id="29" name="TextBox 28"/>
+          <p:cNvPr id="31" name="TextBox 30"/>
           <p:cNvSpPr txBox="1"/>
           <p:nvPr/>
         </p:nvSpPr>
@@ -4701,7 +4789,7 @@
       </p:sp>
       <p:sp>
         <p:nvSpPr>
-          <p:cNvPr id="30" name="Rounded Rectangle 29"/>
+          <p:cNvPr id="32" name="Rounded Rectangle 31"/>
           <p:cNvSpPr/>
           <p:nvPr/>
         </p:nvSpPr>
@@ -4747,7 +4835,7 @@
       </p:sp>
       <p:sp>
         <p:nvSpPr>
-          <p:cNvPr id="31" name="TextBox 30"/>
+          <p:cNvPr id="33" name="TextBox 32"/>
           <p:cNvSpPr txBox="1"/>
           <p:nvPr/>
         </p:nvSpPr>
@@ -4786,7 +4874,7 @@
       </p:sp>
       <p:sp>
         <p:nvSpPr>
-          <p:cNvPr id="32" name="Rounded Rectangle 31"/>
+          <p:cNvPr id="34" name="Rounded Rectangle 33"/>
           <p:cNvSpPr/>
           <p:nvPr/>
         </p:nvSpPr>
@@ -4832,7 +4920,7 @@
       </p:sp>
       <p:sp>
         <p:nvSpPr>
-          <p:cNvPr id="33" name="TextBox 32"/>
+          <p:cNvPr id="35" name="TextBox 34"/>
           <p:cNvSpPr txBox="1"/>
           <p:nvPr/>
         </p:nvSpPr>
@@ -4871,7 +4959,7 @@
       </p:sp>
       <p:sp>
         <p:nvSpPr>
-          <p:cNvPr id="34" name="Rounded Rectangle 33"/>
+          <p:cNvPr id="36" name="Rounded Rectangle 35"/>
           <p:cNvSpPr/>
           <p:nvPr/>
         </p:nvSpPr>
@@ -4917,7 +5005,7 @@
       </p:sp>
       <p:sp>
         <p:nvSpPr>
-          <p:cNvPr id="35" name="TextBox 34"/>
+          <p:cNvPr id="37" name="TextBox 36"/>
           <p:cNvSpPr txBox="1"/>
           <p:nvPr/>
         </p:nvSpPr>
@@ -4956,7 +5044,7 @@
       </p:sp>
       <p:sp>
         <p:nvSpPr>
-          <p:cNvPr id="36" name="Rounded Rectangle 35"/>
+          <p:cNvPr id="38" name="Rounded Rectangle 37"/>
           <p:cNvSpPr/>
           <p:nvPr/>
         </p:nvSpPr>
@@ -5002,7 +5090,7 @@
       </p:sp>
       <p:sp>
         <p:nvSpPr>
-          <p:cNvPr id="37" name="TextBox 36"/>
+          <p:cNvPr id="39" name="TextBox 38"/>
           <p:cNvSpPr txBox="1"/>
           <p:nvPr/>
         </p:nvSpPr>
@@ -5041,7 +5129,7 @@
       </p:sp>
       <p:sp>
         <p:nvSpPr>
-          <p:cNvPr id="38" name="Rounded Rectangle 37"/>
+          <p:cNvPr id="40" name="Rounded Rectangle 39"/>
           <p:cNvSpPr/>
           <p:nvPr/>
         </p:nvSpPr>
@@ -5087,7 +5175,7 @@
       </p:sp>
       <p:sp>
         <p:nvSpPr>
-          <p:cNvPr id="39" name="TextBox 38"/>
+          <p:cNvPr id="41" name="TextBox 40"/>
           <p:cNvSpPr txBox="1"/>
           <p:nvPr/>
         </p:nvSpPr>
@@ -5126,7 +5214,7 @@
       </p:sp>
       <p:sp>
         <p:nvSpPr>
-          <p:cNvPr id="40" name="Rounded Rectangle 39"/>
+          <p:cNvPr id="42" name="Rounded Rectangle 41"/>
           <p:cNvSpPr/>
           <p:nvPr/>
         </p:nvSpPr>
@@ -5172,7 +5260,7 @@
       </p:sp>
       <p:sp>
         <p:nvSpPr>
-          <p:cNvPr id="41" name="TextBox 40"/>
+          <p:cNvPr id="43" name="TextBox 42"/>
           <p:cNvSpPr txBox="1"/>
           <p:nvPr/>
         </p:nvSpPr>
@@ -5211,7 +5299,7 @@
       </p:sp>
       <p:sp>
         <p:nvSpPr>
-          <p:cNvPr id="42" name="Rounded Rectangle 41"/>
+          <p:cNvPr id="44" name="Rounded Rectangle 43"/>
           <p:cNvSpPr/>
           <p:nvPr/>
         </p:nvSpPr>
@@ -5257,7 +5345,7 @@
       </p:sp>
       <p:sp>
         <p:nvSpPr>
-          <p:cNvPr id="43" name="TextBox 42"/>
+          <p:cNvPr id="45" name="TextBox 44"/>
           <p:cNvSpPr txBox="1"/>
           <p:nvPr/>
         </p:nvSpPr>
@@ -5296,7 +5384,7 @@
       </p:sp>
       <p:sp>
         <p:nvSpPr>
-          <p:cNvPr id="44" name="TextBox 43"/>
+          <p:cNvPr id="46" name="TextBox 45"/>
           <p:cNvSpPr txBox="1"/>
           <p:nvPr/>
         </p:nvSpPr>
@@ -5335,7 +5423,7 @@
       </p:sp>
       <p:sp>
         <p:nvSpPr>
-          <p:cNvPr id="45" name="TextBox 44"/>
+          <p:cNvPr id="47" name="TextBox 46"/>
           <p:cNvSpPr txBox="1"/>
           <p:nvPr/>
         </p:nvSpPr>

--- a/docs/Alternative Approach - Summary.pptx
+++ b/docs/Alternative Approach - Summary.pptx
@@ -3858,8 +3858,8 @@
         </p:nvSpPr>
         <p:spPr>
           <a:xfrm>
-            <a:off x="3566160" y="2350008"/>
-            <a:ext cx="5120640" cy="365760"/>
+            <a:off x="2926080" y="2350008"/>
+            <a:ext cx="5577840" cy="365760"/>
           </a:xfrm>
           <a:prstGeom prst="rect">
             <a:avLst/>
@@ -3884,7 +3884,7 @@
                 </a:solidFill>
                 <a:latin typeface="Aptos"/>
               </a:rPr>
-              <a:t>One Sapient Delivery Lead — accountable across all tracks, both lanes</a:t>
+              <a:t>One Sapient Engagement Principal — senior engineering leader; orchestrates through the track SMEs</a:t>
             </a:r>
           </a:p>
         </p:txBody>
@@ -3892,6 +3892,137 @@
       <p:sp>
         <p:nvSpPr>
           <p:cNvPr id="11" name="Rounded Rectangle 10"/>
+          <p:cNvSpPr/>
+          <p:nvPr/>
+        </p:nvSpPr>
+        <p:spPr>
+          <a:xfrm>
+            <a:off x="8732520" y="2286000"/>
+            <a:ext cx="2743200" cy="548640"/>
+          </a:xfrm>
+          <a:prstGeom prst="roundRect">
+            <a:avLst>
+              <a:gd name="adj" fmla="val 6000"/>
+            </a:avLst>
+          </a:prstGeom>
+          <a:solidFill>
+            <a:srgbClr val="F1EDF6"/>
+          </a:solidFill>
+          <a:ln w="9525">
+            <a:solidFill>
+              <a:srgbClr val="C8B9DA"/>
+            </a:solidFill>
+          </a:ln>
+          <a:effectLst/>
+        </p:spPr>
+        <p:style>
+          <a:lnRef idx="1">
+            <a:schemeClr val="accent1"/>
+          </a:lnRef>
+          <a:fillRef idx="3">
+            <a:schemeClr val="accent1"/>
+          </a:fillRef>
+          <a:effectRef idx="2">
+            <a:schemeClr val="accent1"/>
+          </a:effectRef>
+          <a:fontRef idx="minor">
+            <a:schemeClr val="lt1"/>
+          </a:fontRef>
+        </p:style>
+        <p:txBody>
+          <a:bodyPr rtlCol="0" anchor="ctr"/>
+          <a:lstStyle/>
+          <a:p>
+            <a:pPr algn="ctr"/>
+          </a:p>
+        </p:txBody>
+      </p:sp>
+      <p:sp>
+        <p:nvSpPr>
+          <p:cNvPr id="12" name="Rectangle 11"/>
+          <p:cNvSpPr/>
+          <p:nvPr/>
+        </p:nvSpPr>
+        <p:spPr>
+          <a:xfrm>
+            <a:off x="8613648" y="2532888"/>
+            <a:ext cx="118872" cy="36576"/>
+          </a:xfrm>
+          <a:prstGeom prst="rect">
+            <a:avLst/>
+          </a:prstGeom>
+          <a:solidFill>
+            <a:srgbClr val="684E86"/>
+          </a:solidFill>
+          <a:ln>
+            <a:noFill/>
+          </a:ln>
+          <a:effectLst/>
+        </p:spPr>
+        <p:style>
+          <a:lnRef idx="1">
+            <a:schemeClr val="accent1"/>
+          </a:lnRef>
+          <a:fillRef idx="3">
+            <a:schemeClr val="accent1"/>
+          </a:fillRef>
+          <a:effectRef idx="2">
+            <a:schemeClr val="accent1"/>
+          </a:effectRef>
+          <a:fontRef idx="minor">
+            <a:schemeClr val="lt1"/>
+          </a:fontRef>
+        </p:style>
+        <p:txBody>
+          <a:bodyPr rtlCol="0" anchor="ctr"/>
+          <a:lstStyle/>
+          <a:p>
+            <a:pPr algn="ctr"/>
+          </a:p>
+        </p:txBody>
+      </p:sp>
+      <p:sp>
+        <p:nvSpPr>
+          <p:cNvPr id="13" name="TextBox 12"/>
+          <p:cNvSpPr txBox="1"/>
+          <p:nvPr/>
+        </p:nvSpPr>
+        <p:spPr>
+          <a:xfrm>
+            <a:off x="8823960" y="2322576"/>
+            <a:ext cx="2560320" cy="475488"/>
+          </a:xfrm>
+          <a:prstGeom prst="rect">
+            <a:avLst/>
+          </a:prstGeom>
+          <a:noFill/>
+        </p:spPr>
+        <p:txBody>
+          <a:bodyPr wrap="square">
+            <a:spAutoFit/>
+          </a:bodyPr>
+          <a:lstStyle/>
+          <a:p>
+            <a:pPr algn="l">
+              <a:lnSpc>
+                <a:spcPct val="100000"/>
+              </a:lnSpc>
+            </a:pPr>
+            <a:r>
+              <a:rPr sz="850" b="1">
+                <a:solidFill>
+                  <a:srgbClr val="684E86"/>
+                </a:solidFill>
+                <a:latin typeface="Aptos"/>
+              </a:rPr>
+              <a:t>Draws on — Sapient senior thought leadership &amp; global CoE</a:t>
+            </a:r>
+          </a:p>
+        </p:txBody>
+      </p:sp>
+      <p:sp>
+        <p:nvSpPr>
+          <p:cNvPr id="14" name="Rounded Rectangle 13"/>
           <p:cNvSpPr/>
           <p:nvPr/>
         </p:nvSpPr>
@@ -3940,7 +4071,7 @@
       </p:sp>
       <p:sp>
         <p:nvSpPr>
-          <p:cNvPr id="12" name="TextBox 11"/>
+          <p:cNvPr id="15" name="TextBox 14"/>
           <p:cNvSpPr txBox="1"/>
           <p:nvPr/>
         </p:nvSpPr>
@@ -3979,7 +4110,7 @@
       </p:sp>
       <p:sp>
         <p:nvSpPr>
-          <p:cNvPr id="13" name="Rounded Rectangle 12"/>
+          <p:cNvPr id="16" name="Rounded Rectangle 15"/>
           <p:cNvSpPr/>
           <p:nvPr/>
         </p:nvSpPr>
@@ -4027,14 +4158,14 @@
       </p:sp>
       <p:sp>
         <p:nvSpPr>
-          <p:cNvPr id="14" name="TextBox 13"/>
+          <p:cNvPr id="17" name="TextBox 16"/>
           <p:cNvSpPr txBox="1"/>
           <p:nvPr/>
         </p:nvSpPr>
         <p:spPr>
           <a:xfrm>
-            <a:off x="777240" y="3383280"/>
-            <a:ext cx="3246120" cy="274320"/>
+            <a:off x="777240" y="3346704"/>
+            <a:ext cx="3246120" cy="256032"/>
           </a:xfrm>
           <a:prstGeom prst="rect">
             <a:avLst/>
@@ -4053,7 +4184,7 @@
               </a:lnSpc>
             </a:pPr>
             <a:r>
-              <a:rPr sz="1250" b="1">
+              <a:rPr sz="1200" b="1">
                 <a:solidFill>
                   <a:srgbClr val="16181D"/>
                 </a:solidFill>
@@ -4066,14 +4197,101 @@
       </p:sp>
       <p:sp>
         <p:nvSpPr>
-          <p:cNvPr id="15" name="Rounded Rectangle 14"/>
+          <p:cNvPr id="18" name="Rounded Rectangle 17"/>
           <p:cNvSpPr/>
           <p:nvPr/>
         </p:nvSpPr>
         <p:spPr>
           <a:xfrm>
-            <a:off x="777240" y="3712463"/>
-            <a:ext cx="3246120" cy="402336"/>
+            <a:off x="777240" y="3584448"/>
+            <a:ext cx="3246120" cy="292608"/>
+          </a:xfrm>
+          <a:prstGeom prst="roundRect">
+            <a:avLst>
+              <a:gd name="adj" fmla="val 6000"/>
+            </a:avLst>
+          </a:prstGeom>
+          <a:solidFill>
+            <a:srgbClr val="FBF3E3"/>
+          </a:solidFill>
+          <a:ln w="9525">
+            <a:solidFill>
+              <a:srgbClr val="DDBB8C"/>
+            </a:solidFill>
+          </a:ln>
+          <a:effectLst/>
+        </p:spPr>
+        <p:style>
+          <a:lnRef idx="1">
+            <a:schemeClr val="accent1"/>
+          </a:lnRef>
+          <a:fillRef idx="3">
+            <a:schemeClr val="accent1"/>
+          </a:fillRef>
+          <a:effectRef idx="2">
+            <a:schemeClr val="accent1"/>
+          </a:effectRef>
+          <a:fontRef idx="minor">
+            <a:schemeClr val="lt1"/>
+          </a:fontRef>
+        </p:style>
+        <p:txBody>
+          <a:bodyPr rtlCol="0" anchor="ctr"/>
+          <a:lstStyle/>
+          <a:p>
+            <a:pPr algn="ctr"/>
+          </a:p>
+        </p:txBody>
+      </p:sp>
+      <p:sp>
+        <p:nvSpPr>
+          <p:cNvPr id="19" name="TextBox 18"/>
+          <p:cNvSpPr txBox="1"/>
+          <p:nvPr/>
+        </p:nvSpPr>
+        <p:spPr>
+          <a:xfrm>
+            <a:off x="868680" y="3630168"/>
+            <a:ext cx="3108960" cy="219456"/>
+          </a:xfrm>
+          <a:prstGeom prst="rect">
+            <a:avLst/>
+          </a:prstGeom>
+          <a:noFill/>
+        </p:spPr>
+        <p:txBody>
+          <a:bodyPr wrap="square">
+            <a:spAutoFit/>
+          </a:bodyPr>
+          <a:lstStyle/>
+          <a:p>
+            <a:pPr algn="l">
+              <a:lnSpc>
+                <a:spcPct val="106000"/>
+              </a:lnSpc>
+            </a:pPr>
+            <a:r>
+              <a:rPr sz="850" b="1">
+                <a:solidFill>
+                  <a:srgbClr val="A3671F"/>
+                </a:solidFill>
+                <a:latin typeface="Aptos"/>
+              </a:rPr>
+              <a:t>Deep SME — Databricks · Kafka · integration</a:t>
+            </a:r>
+          </a:p>
+        </p:txBody>
+      </p:sp>
+      <p:sp>
+        <p:nvSpPr>
+          <p:cNvPr id="20" name="Rounded Rectangle 19"/>
+          <p:cNvSpPr/>
+          <p:nvPr/>
+        </p:nvSpPr>
+        <p:spPr>
+          <a:xfrm>
+            <a:off x="777240" y="3931920"/>
+            <a:ext cx="3246120" cy="310896"/>
           </a:xfrm>
           <a:prstGeom prst="roundRect">
             <a:avLst>
@@ -4112,14 +4330,14 @@
       </p:sp>
       <p:sp>
         <p:nvSpPr>
-          <p:cNvPr id="16" name="TextBox 15"/>
+          <p:cNvPr id="21" name="TextBox 20"/>
           <p:cNvSpPr txBox="1"/>
           <p:nvPr/>
         </p:nvSpPr>
         <p:spPr>
           <a:xfrm>
-            <a:off x="868680" y="3767328"/>
-            <a:ext cx="3108960" cy="320040"/>
+            <a:off x="868680" y="3986784"/>
+            <a:ext cx="3108960" cy="237744"/>
           </a:xfrm>
           <a:prstGeom prst="rect">
             <a:avLst/>
@@ -4138,7 +4356,7 @@
               </a:lnSpc>
             </a:pPr>
             <a:r>
-              <a:rPr sz="950" b="0">
+              <a:rPr sz="900" b="0">
                 <a:solidFill>
                   <a:srgbClr val="55763F"/>
                 </a:solidFill>
@@ -4151,14 +4369,14 @@
       </p:sp>
       <p:sp>
         <p:nvSpPr>
-          <p:cNvPr id="17" name="Rounded Rectangle 16"/>
+          <p:cNvPr id="22" name="Rounded Rectangle 21"/>
           <p:cNvSpPr/>
           <p:nvPr/>
         </p:nvSpPr>
         <p:spPr>
           <a:xfrm>
-            <a:off x="777240" y="4151376"/>
-            <a:ext cx="3246120" cy="402336"/>
+            <a:off x="777240" y="4279392"/>
+            <a:ext cx="3246120" cy="310896"/>
           </a:xfrm>
           <a:prstGeom prst="roundRect">
             <a:avLst>
@@ -4197,14 +4415,14 @@
       </p:sp>
       <p:sp>
         <p:nvSpPr>
-          <p:cNvPr id="18" name="TextBox 17"/>
+          <p:cNvPr id="23" name="TextBox 22"/>
           <p:cNvSpPr txBox="1"/>
           <p:nvPr/>
         </p:nvSpPr>
         <p:spPr>
           <a:xfrm>
-            <a:off x="868680" y="4206240"/>
-            <a:ext cx="3108960" cy="320040"/>
+            <a:off x="868680" y="4334256"/>
+            <a:ext cx="3108960" cy="237744"/>
           </a:xfrm>
           <a:prstGeom prst="rect">
             <a:avLst/>
@@ -4223,7 +4441,7 @@
               </a:lnSpc>
             </a:pPr>
             <a:r>
-              <a:rPr sz="950" b="0">
+              <a:rPr sz="900" b="0">
                 <a:solidFill>
                   <a:srgbClr val="A3671F"/>
                 </a:solidFill>
@@ -4236,7 +4454,7 @@
       </p:sp>
       <p:sp>
         <p:nvSpPr>
-          <p:cNvPr id="19" name="Rounded Rectangle 18"/>
+          <p:cNvPr id="24" name="Rounded Rectangle 23"/>
           <p:cNvSpPr/>
           <p:nvPr/>
         </p:nvSpPr>
@@ -4284,14 +4502,14 @@
       </p:sp>
       <p:sp>
         <p:nvSpPr>
-          <p:cNvPr id="20" name="TextBox 19"/>
+          <p:cNvPr id="25" name="TextBox 24"/>
           <p:cNvSpPr txBox="1"/>
           <p:nvPr/>
         </p:nvSpPr>
         <p:spPr>
           <a:xfrm>
-            <a:off x="4480560" y="3383280"/>
-            <a:ext cx="3246120" cy="274320"/>
+            <a:off x="4480560" y="3346704"/>
+            <a:ext cx="3246120" cy="256032"/>
           </a:xfrm>
           <a:prstGeom prst="rect">
             <a:avLst/>
@@ -4310,7 +4528,7 @@
               </a:lnSpc>
             </a:pPr>
             <a:r>
-              <a:rPr sz="1250" b="1">
+              <a:rPr sz="1200" b="1">
                 <a:solidFill>
                   <a:srgbClr val="16181D"/>
                 </a:solidFill>
@@ -4323,14 +4541,101 @@
       </p:sp>
       <p:sp>
         <p:nvSpPr>
-          <p:cNvPr id="21" name="Rounded Rectangle 20"/>
+          <p:cNvPr id="26" name="Rounded Rectangle 25"/>
           <p:cNvSpPr/>
           <p:nvPr/>
         </p:nvSpPr>
         <p:spPr>
           <a:xfrm>
-            <a:off x="4480560" y="3712463"/>
-            <a:ext cx="3246120" cy="402336"/>
+            <a:off x="4480560" y="3584448"/>
+            <a:ext cx="3246120" cy="292608"/>
+          </a:xfrm>
+          <a:prstGeom prst="roundRect">
+            <a:avLst>
+              <a:gd name="adj" fmla="val 6000"/>
+            </a:avLst>
+          </a:prstGeom>
+          <a:solidFill>
+            <a:srgbClr val="FBF3E3"/>
+          </a:solidFill>
+          <a:ln w="9525">
+            <a:solidFill>
+              <a:srgbClr val="DDBB8C"/>
+            </a:solidFill>
+          </a:ln>
+          <a:effectLst/>
+        </p:spPr>
+        <p:style>
+          <a:lnRef idx="1">
+            <a:schemeClr val="accent1"/>
+          </a:lnRef>
+          <a:fillRef idx="3">
+            <a:schemeClr val="accent1"/>
+          </a:fillRef>
+          <a:effectRef idx="2">
+            <a:schemeClr val="accent1"/>
+          </a:effectRef>
+          <a:fontRef idx="minor">
+            <a:schemeClr val="lt1"/>
+          </a:fontRef>
+        </p:style>
+        <p:txBody>
+          <a:bodyPr rtlCol="0" anchor="ctr"/>
+          <a:lstStyle/>
+          <a:p>
+            <a:pPr algn="ctr"/>
+          </a:p>
+        </p:txBody>
+      </p:sp>
+      <p:sp>
+        <p:nvSpPr>
+          <p:cNvPr id="27" name="TextBox 26"/>
+          <p:cNvSpPr txBox="1"/>
+          <p:nvPr/>
+        </p:nvSpPr>
+        <p:spPr>
+          <a:xfrm>
+            <a:off x="4572000" y="3630168"/>
+            <a:ext cx="3108960" cy="219456"/>
+          </a:xfrm>
+          <a:prstGeom prst="rect">
+            <a:avLst/>
+          </a:prstGeom>
+          <a:noFill/>
+        </p:spPr>
+        <p:txBody>
+          <a:bodyPr wrap="square">
+            <a:spAutoFit/>
+          </a:bodyPr>
+          <a:lstStyle/>
+          <a:p>
+            <a:pPr algn="l">
+              <a:lnSpc>
+                <a:spcPct val="106000"/>
+              </a:lnSpc>
+            </a:pPr>
+            <a:r>
+              <a:rPr sz="850" b="1">
+                <a:solidFill>
+                  <a:srgbClr val="A3671F"/>
+                </a:solidFill>
+                <a:latin typeface="Aptos"/>
+              </a:rPr>
+              <a:t>Deep SME — Kubernetes · Terraform · CI/CD</a:t>
+            </a:r>
+          </a:p>
+        </p:txBody>
+      </p:sp>
+      <p:sp>
+        <p:nvSpPr>
+          <p:cNvPr id="28" name="Rounded Rectangle 27"/>
+          <p:cNvSpPr/>
+          <p:nvPr/>
+        </p:nvSpPr>
+        <p:spPr>
+          <a:xfrm>
+            <a:off x="4480560" y="3931920"/>
+            <a:ext cx="3246120" cy="310896"/>
           </a:xfrm>
           <a:prstGeom prst="roundRect">
             <a:avLst>
@@ -4369,14 +4674,14 @@
       </p:sp>
       <p:sp>
         <p:nvSpPr>
-          <p:cNvPr id="22" name="TextBox 21"/>
+          <p:cNvPr id="29" name="TextBox 28"/>
           <p:cNvSpPr txBox="1"/>
           <p:nvPr/>
         </p:nvSpPr>
         <p:spPr>
           <a:xfrm>
-            <a:off x="4572000" y="3767328"/>
-            <a:ext cx="3108960" cy="320040"/>
+            <a:off x="4572000" y="3986784"/>
+            <a:ext cx="3108960" cy="237744"/>
           </a:xfrm>
           <a:prstGeom prst="rect">
             <a:avLst/>
@@ -4395,7 +4700,7 @@
               </a:lnSpc>
             </a:pPr>
             <a:r>
-              <a:rPr sz="950" b="0">
+              <a:rPr sz="900" b="0">
                 <a:solidFill>
                   <a:srgbClr val="55763F"/>
                 </a:solidFill>
@@ -4408,14 +4713,14 @@
       </p:sp>
       <p:sp>
         <p:nvSpPr>
-          <p:cNvPr id="23" name="Rounded Rectangle 22"/>
+          <p:cNvPr id="30" name="Rounded Rectangle 29"/>
           <p:cNvSpPr/>
           <p:nvPr/>
         </p:nvSpPr>
         <p:spPr>
           <a:xfrm>
-            <a:off x="4480560" y="4151376"/>
-            <a:ext cx="3246120" cy="402336"/>
+            <a:off x="4480560" y="4279392"/>
+            <a:ext cx="3246120" cy="310896"/>
           </a:xfrm>
           <a:prstGeom prst="roundRect">
             <a:avLst>
@@ -4454,14 +4759,14 @@
       </p:sp>
       <p:sp>
         <p:nvSpPr>
-          <p:cNvPr id="24" name="TextBox 23"/>
+          <p:cNvPr id="31" name="TextBox 30"/>
           <p:cNvSpPr txBox="1"/>
           <p:nvPr/>
         </p:nvSpPr>
         <p:spPr>
           <a:xfrm>
-            <a:off x="4572000" y="4206240"/>
-            <a:ext cx="3108960" cy="320040"/>
+            <a:off x="4572000" y="4334256"/>
+            <a:ext cx="3108960" cy="237744"/>
           </a:xfrm>
           <a:prstGeom prst="rect">
             <a:avLst/>
@@ -4480,7 +4785,7 @@
               </a:lnSpc>
             </a:pPr>
             <a:r>
-              <a:rPr sz="950" b="0">
+              <a:rPr sz="900" b="0">
                 <a:solidFill>
                   <a:srgbClr val="A3671F"/>
                 </a:solidFill>
@@ -4493,7 +4798,7 @@
       </p:sp>
       <p:sp>
         <p:nvSpPr>
-          <p:cNvPr id="25" name="Rounded Rectangle 24"/>
+          <p:cNvPr id="32" name="Rounded Rectangle 31"/>
           <p:cNvSpPr/>
           <p:nvPr/>
         </p:nvSpPr>
@@ -4541,14 +4846,14 @@
       </p:sp>
       <p:sp>
         <p:nvSpPr>
-          <p:cNvPr id="26" name="TextBox 25"/>
+          <p:cNvPr id="33" name="TextBox 32"/>
           <p:cNvSpPr txBox="1"/>
           <p:nvPr/>
         </p:nvSpPr>
         <p:spPr>
           <a:xfrm>
-            <a:off x="8183879" y="3383280"/>
-            <a:ext cx="3246120" cy="274320"/>
+            <a:off x="8183879" y="3346704"/>
+            <a:ext cx="3246120" cy="256032"/>
           </a:xfrm>
           <a:prstGeom prst="rect">
             <a:avLst/>
@@ -4567,7 +4872,7 @@
               </a:lnSpc>
             </a:pPr>
             <a:r>
-              <a:rPr sz="1250" b="1">
+              <a:rPr sz="1200" b="1">
                 <a:solidFill>
                   <a:srgbClr val="16181D"/>
                 </a:solidFill>
@@ -4580,14 +4885,101 @@
       </p:sp>
       <p:sp>
         <p:nvSpPr>
-          <p:cNvPr id="27" name="Rounded Rectangle 26"/>
+          <p:cNvPr id="34" name="Rounded Rectangle 33"/>
           <p:cNvSpPr/>
           <p:nvPr/>
         </p:nvSpPr>
         <p:spPr>
           <a:xfrm>
-            <a:off x="8183879" y="3712463"/>
-            <a:ext cx="3246120" cy="402336"/>
+            <a:off x="8183879" y="3584448"/>
+            <a:ext cx="3246120" cy="292608"/>
+          </a:xfrm>
+          <a:prstGeom prst="roundRect">
+            <a:avLst>
+              <a:gd name="adj" fmla="val 6000"/>
+            </a:avLst>
+          </a:prstGeom>
+          <a:solidFill>
+            <a:srgbClr val="FBF3E3"/>
+          </a:solidFill>
+          <a:ln w="9525">
+            <a:solidFill>
+              <a:srgbClr val="DDBB8C"/>
+            </a:solidFill>
+          </a:ln>
+          <a:effectLst/>
+        </p:spPr>
+        <p:style>
+          <a:lnRef idx="1">
+            <a:schemeClr val="accent1"/>
+          </a:lnRef>
+          <a:fillRef idx="3">
+            <a:schemeClr val="accent1"/>
+          </a:fillRef>
+          <a:effectRef idx="2">
+            <a:schemeClr val="accent1"/>
+          </a:effectRef>
+          <a:fontRef idx="minor">
+            <a:schemeClr val="lt1"/>
+          </a:fontRef>
+        </p:style>
+        <p:txBody>
+          <a:bodyPr rtlCol="0" anchor="ctr"/>
+          <a:lstStyle/>
+          <a:p>
+            <a:pPr algn="ctr"/>
+          </a:p>
+        </p:txBody>
+      </p:sp>
+      <p:sp>
+        <p:nvSpPr>
+          <p:cNvPr id="35" name="TextBox 34"/>
+          <p:cNvSpPr txBox="1"/>
+          <p:nvPr/>
+        </p:nvSpPr>
+        <p:spPr>
+          <a:xfrm>
+            <a:off x="8275319" y="3630168"/>
+            <a:ext cx="3108960" cy="219456"/>
+          </a:xfrm>
+          <a:prstGeom prst="rect">
+            <a:avLst/>
+          </a:prstGeom>
+          <a:noFill/>
+        </p:spPr>
+        <p:txBody>
+          <a:bodyPr wrap="square">
+            <a:spAutoFit/>
+          </a:bodyPr>
+          <a:lstStyle/>
+          <a:p>
+            <a:pPr algn="l">
+              <a:lnSpc>
+                <a:spcPct val="106000"/>
+              </a:lnSpc>
+            </a:pPr>
+            <a:r>
+              <a:rPr sz="850" b="1">
+                <a:solidFill>
+                  <a:srgbClr val="A3671F"/>
+                </a:solidFill>
+                <a:latin typeface="Aptos"/>
+              </a:rPr>
+              <a:t>Deep SME — AI platform · evals · FinOps</a:t>
+            </a:r>
+          </a:p>
+        </p:txBody>
+      </p:sp>
+      <p:sp>
+        <p:nvSpPr>
+          <p:cNvPr id="36" name="Rounded Rectangle 35"/>
+          <p:cNvSpPr/>
+          <p:nvPr/>
+        </p:nvSpPr>
+        <p:spPr>
+          <a:xfrm>
+            <a:off x="8183879" y="3931920"/>
+            <a:ext cx="3246120" cy="310896"/>
           </a:xfrm>
           <a:prstGeom prst="roundRect">
             <a:avLst>
@@ -4626,14 +5018,14 @@
       </p:sp>
       <p:sp>
         <p:nvSpPr>
-          <p:cNvPr id="28" name="TextBox 27"/>
+          <p:cNvPr id="37" name="TextBox 36"/>
           <p:cNvSpPr txBox="1"/>
           <p:nvPr/>
         </p:nvSpPr>
         <p:spPr>
           <a:xfrm>
-            <a:off x="8275319" y="3767328"/>
-            <a:ext cx="3108960" cy="320040"/>
+            <a:off x="8275319" y="3986784"/>
+            <a:ext cx="3108960" cy="237744"/>
           </a:xfrm>
           <a:prstGeom prst="rect">
             <a:avLst/>
@@ -4652,7 +5044,7 @@
               </a:lnSpc>
             </a:pPr>
             <a:r>
-              <a:rPr sz="950" b="0">
+              <a:rPr sz="900" b="0">
                 <a:solidFill>
                   <a:srgbClr val="55763F"/>
                 </a:solidFill>
@@ -4665,14 +5057,14 @@
       </p:sp>
       <p:sp>
         <p:nvSpPr>
-          <p:cNvPr id="29" name="Rounded Rectangle 28"/>
+          <p:cNvPr id="38" name="Rounded Rectangle 37"/>
           <p:cNvSpPr/>
           <p:nvPr/>
         </p:nvSpPr>
         <p:spPr>
           <a:xfrm>
-            <a:off x="8183879" y="4151376"/>
-            <a:ext cx="3246120" cy="402336"/>
+            <a:off x="8183879" y="4279392"/>
+            <a:ext cx="3246120" cy="310896"/>
           </a:xfrm>
           <a:prstGeom prst="roundRect">
             <a:avLst>
@@ -4711,14 +5103,14 @@
       </p:sp>
       <p:sp>
         <p:nvSpPr>
-          <p:cNvPr id="30" name="TextBox 29"/>
+          <p:cNvPr id="39" name="TextBox 38"/>
           <p:cNvSpPr txBox="1"/>
           <p:nvPr/>
         </p:nvSpPr>
         <p:spPr>
           <a:xfrm>
-            <a:off x="8275319" y="4206240"/>
-            <a:ext cx="3108960" cy="320040"/>
+            <a:off x="8275319" y="4334256"/>
+            <a:ext cx="3108960" cy="237744"/>
           </a:xfrm>
           <a:prstGeom prst="rect">
             <a:avLst/>
@@ -4737,7 +5129,7 @@
               </a:lnSpc>
             </a:pPr>
             <a:r>
-              <a:rPr sz="950" b="0">
+              <a:rPr sz="900" b="0">
                 <a:solidFill>
                   <a:srgbClr val="A3671F"/>
                 </a:solidFill>
@@ -4750,7 +5142,7 @@
       </p:sp>
       <p:sp>
         <p:nvSpPr>
-          <p:cNvPr id="31" name="TextBox 30"/>
+          <p:cNvPr id="40" name="TextBox 39"/>
           <p:cNvSpPr txBox="1"/>
           <p:nvPr/>
         </p:nvSpPr>
@@ -4789,7 +5181,7 @@
       </p:sp>
       <p:sp>
         <p:nvSpPr>
-          <p:cNvPr id="32" name="Rounded Rectangle 31"/>
+          <p:cNvPr id="41" name="Rounded Rectangle 40"/>
           <p:cNvSpPr/>
           <p:nvPr/>
         </p:nvSpPr>
@@ -4835,7 +5227,7 @@
       </p:sp>
       <p:sp>
         <p:nvSpPr>
-          <p:cNvPr id="33" name="TextBox 32"/>
+          <p:cNvPr id="42" name="TextBox 41"/>
           <p:cNvSpPr txBox="1"/>
           <p:nvPr/>
         </p:nvSpPr>
@@ -4874,7 +5266,7 @@
       </p:sp>
       <p:sp>
         <p:nvSpPr>
-          <p:cNvPr id="34" name="Rounded Rectangle 33"/>
+          <p:cNvPr id="43" name="Rounded Rectangle 42"/>
           <p:cNvSpPr/>
           <p:nvPr/>
         </p:nvSpPr>
@@ -4920,7 +5312,7 @@
       </p:sp>
       <p:sp>
         <p:nvSpPr>
-          <p:cNvPr id="35" name="TextBox 34"/>
+          <p:cNvPr id="44" name="TextBox 43"/>
           <p:cNvSpPr txBox="1"/>
           <p:nvPr/>
         </p:nvSpPr>
@@ -4959,7 +5351,7 @@
       </p:sp>
       <p:sp>
         <p:nvSpPr>
-          <p:cNvPr id="36" name="Rounded Rectangle 35"/>
+          <p:cNvPr id="45" name="Rounded Rectangle 44"/>
           <p:cNvSpPr/>
           <p:nvPr/>
         </p:nvSpPr>
@@ -5005,7 +5397,7 @@
       </p:sp>
       <p:sp>
         <p:nvSpPr>
-          <p:cNvPr id="37" name="TextBox 36"/>
+          <p:cNvPr id="46" name="TextBox 45"/>
           <p:cNvSpPr txBox="1"/>
           <p:nvPr/>
         </p:nvSpPr>
@@ -5044,7 +5436,7 @@
       </p:sp>
       <p:sp>
         <p:nvSpPr>
-          <p:cNvPr id="38" name="Rounded Rectangle 37"/>
+          <p:cNvPr id="47" name="Rounded Rectangle 46"/>
           <p:cNvSpPr/>
           <p:nvPr/>
         </p:nvSpPr>
@@ -5090,7 +5482,7 @@
       </p:sp>
       <p:sp>
         <p:nvSpPr>
-          <p:cNvPr id="39" name="TextBox 38"/>
+          <p:cNvPr id="48" name="TextBox 47"/>
           <p:cNvSpPr txBox="1"/>
           <p:nvPr/>
         </p:nvSpPr>
@@ -5129,7 +5521,7 @@
       </p:sp>
       <p:sp>
         <p:nvSpPr>
-          <p:cNvPr id="40" name="Rounded Rectangle 39"/>
+          <p:cNvPr id="49" name="Rounded Rectangle 48"/>
           <p:cNvSpPr/>
           <p:nvPr/>
         </p:nvSpPr>
@@ -5175,7 +5567,7 @@
       </p:sp>
       <p:sp>
         <p:nvSpPr>
-          <p:cNvPr id="41" name="TextBox 40"/>
+          <p:cNvPr id="50" name="TextBox 49"/>
           <p:cNvSpPr txBox="1"/>
           <p:nvPr/>
         </p:nvSpPr>
@@ -5214,7 +5606,7 @@
       </p:sp>
       <p:sp>
         <p:nvSpPr>
-          <p:cNvPr id="42" name="Rounded Rectangle 41"/>
+          <p:cNvPr id="51" name="Rounded Rectangle 50"/>
           <p:cNvSpPr/>
           <p:nvPr/>
         </p:nvSpPr>
@@ -5260,7 +5652,7 @@
       </p:sp>
       <p:sp>
         <p:nvSpPr>
-          <p:cNvPr id="43" name="TextBox 42"/>
+          <p:cNvPr id="52" name="TextBox 51"/>
           <p:cNvSpPr txBox="1"/>
           <p:nvPr/>
         </p:nvSpPr>
@@ -5299,7 +5691,7 @@
       </p:sp>
       <p:sp>
         <p:nvSpPr>
-          <p:cNvPr id="44" name="Rounded Rectangle 43"/>
+          <p:cNvPr id="53" name="Rounded Rectangle 52"/>
           <p:cNvSpPr/>
           <p:nvPr/>
         </p:nvSpPr>
@@ -5345,7 +5737,7 @@
       </p:sp>
       <p:sp>
         <p:nvSpPr>
-          <p:cNvPr id="45" name="TextBox 44"/>
+          <p:cNvPr id="54" name="TextBox 53"/>
           <p:cNvSpPr txBox="1"/>
           <p:nvPr/>
         </p:nvSpPr>
@@ -5384,7 +5776,7 @@
       </p:sp>
       <p:sp>
         <p:nvSpPr>
-          <p:cNvPr id="46" name="TextBox 45"/>
+          <p:cNvPr id="55" name="TextBox 54"/>
           <p:cNvSpPr txBox="1"/>
           <p:nvPr/>
         </p:nvSpPr>
@@ -5423,7 +5815,7 @@
       </p:sp>
       <p:sp>
         <p:nvSpPr>
-          <p:cNvPr id="47" name="TextBox 46"/>
+          <p:cNvPr id="56" name="TextBox 55"/>
           <p:cNvSpPr txBox="1"/>
           <p:nvPr/>
         </p:nvSpPr>
@@ -5455,7 +5847,7 @@
                 </a:solidFill>
                 <a:latin typeface="Aptos"/>
               </a:rPr>
-              <a:t>Control is structural: every gate and every dial-up needs a named Pandora owner's sign-off.</a:t>
+              <a:t>No one person is the deep expert in everything: each track carries its own SME, the Principal orchestrates through them and draws on Sapient's senior thought leadership — while every gate needs a named Pandora sign-off.</a:t>
             </a:r>
           </a:p>
         </p:txBody>
@@ -6815,7 +7207,7 @@
         </p:nvGraphicFramePr>
         <p:xfrm>
           <a:off x="640080" y="1417320"/>
-          <a:ext cx="10972800" cy="3200400"/>
+          <a:ext cx="11109955" cy="3328416"/>
         </p:xfrm>
         <a:graphic>
           <a:graphicData uri="http://schemas.openxmlformats.org/drawingml/2006/table">
@@ -6824,20 +7216,21 @@
                 <a:tableStyleId>{5C22544A-7EE6-4342-B048-85BDC9FD1C3A}</a:tableStyleId>
               </a:tblPr>
               <a:tblGrid>
-                <a:gridCol w="2011680"/>
-                <a:gridCol w="2240280"/>
-                <a:gridCol w="2240280"/>
-                <a:gridCol w="2240280"/>
-                <a:gridCol w="2240280"/>
+                <a:gridCol w="1737360"/>
+                <a:gridCol w="1874519"/>
+                <a:gridCol w="1874519"/>
+                <a:gridCol w="1874519"/>
+                <a:gridCol w="1874519"/>
+                <a:gridCol w="1874519"/>
               </a:tblGrid>
-              <a:tr h="457200">
+              <a:tr h="475488">
                 <a:tc>
                   <a:txBody>
                     <a:bodyPr wrap="square"/>
                     <a:lstStyle/>
                     <a:p>
                       <a:r>
-                        <a:rPr sz="850" b="1">
+                        <a:rPr sz="800" b="1">
                           <a:solidFill>
                             <a:srgbClr val="5C6066"/>
                           </a:solidFill>
@@ -6859,7 +7252,7 @@
                     <a:lstStyle/>
                     <a:p>
                       <a:r>
-                        <a:rPr sz="850" b="1">
+                        <a:rPr sz="800" b="1">
                           <a:solidFill>
                             <a:srgbClr val="5C6066"/>
                           </a:solidFill>
@@ -6881,7 +7274,7 @@
                     <a:lstStyle/>
                     <a:p>
                       <a:r>
-                        <a:rPr sz="850" b="1">
+                        <a:rPr sz="800" b="1">
                           <a:solidFill>
                             <a:srgbClr val="5C6066"/>
                           </a:solidFill>
@@ -6903,7 +7296,7 @@
                     <a:lstStyle/>
                     <a:p>
                       <a:r>
-                        <a:rPr sz="850" b="1">
+                        <a:rPr sz="800" b="1">
                           <a:solidFill>
                             <a:srgbClr val="5C6066"/>
                           </a:solidFill>
@@ -6925,7 +7318,29 @@
                     <a:lstStyle/>
                     <a:p>
                       <a:r>
-                        <a:rPr sz="850" b="1">
+                        <a:rPr sz="800" b="1">
+                          <a:solidFill>
+                            <a:srgbClr val="5C6066"/>
+                          </a:solidFill>
+                          <a:latin typeface="Aptos"/>
+                        </a:rPr>
+                        <a:t>Improve &amp; Evolve · Lane 2 backlog</a:t>
+                      </a:r>
+                    </a:p>
+                  </a:txBody>
+                  <a:tcPr marL="73152" marR="54864" marT="27432" marB="27432" anchor="ctr">
+                    <a:solidFill>
+                      <a:srgbClr val="FBFAF8"/>
+                    </a:solidFill>
+                  </a:tcPr>
+                </a:tc>
+                <a:tc>
+                  <a:txBody>
+                    <a:bodyPr wrap="square"/>
+                    <a:lstStyle/>
+                    <a:p>
+                      <a:r>
+                        <a:rPr sz="800" b="1">
                           <a:solidFill>
                             <a:srgbClr val="5C6066"/>
                           </a:solidFill>
@@ -6942,14 +7357,14 @@
                   </a:tcPr>
                 </a:tc>
               </a:tr>
-              <a:tr h="457200">
+              <a:tr h="475488">
                 <a:tc>
                   <a:txBody>
                     <a:bodyPr wrap="square"/>
                     <a:lstStyle/>
                     <a:p>
                       <a:r>
-                        <a:rPr sz="780" b="1">
+                        <a:rPr sz="700" b="1">
                           <a:solidFill>
                             <a:srgbClr val="16181D"/>
                           </a:solidFill>
@@ -6971,7 +7386,7 @@
                     <a:lstStyle/>
                     <a:p>
                       <a:r>
-                        <a:rPr sz="780" b="0">
+                        <a:rPr sz="700" b="0">
                           <a:solidFill>
                             <a:srgbClr val="16181D"/>
                           </a:solidFill>
@@ -6993,7 +7408,7 @@
                     <a:lstStyle/>
                     <a:p>
                       <a:r>
-                        <a:rPr sz="780" b="0">
+                        <a:rPr sz="700" b="0">
                           <a:solidFill>
                             <a:srgbClr val="16181D"/>
                           </a:solidFill>
@@ -7015,7 +7430,7 @@
                     <a:lstStyle/>
                     <a:p>
                       <a:r>
-                        <a:rPr sz="780" b="0">
+                        <a:rPr sz="700" b="0">
                           <a:solidFill>
                             <a:srgbClr val="16181D"/>
                           </a:solidFill>
@@ -7037,7 +7452,29 @@
                     <a:lstStyle/>
                     <a:p>
                       <a:r>
-                        <a:rPr sz="780" b="0">
+                        <a:rPr sz="700" b="0">
+                          <a:solidFill>
+                            <a:srgbClr val="16181D"/>
+                          </a:solidFill>
+                          <a:latin typeface="Aptos"/>
+                        </a:rPr>
+                        <a:t>Backlog: auto-DQ triage, self-healing reruns, templates as dial-up candidates</a:t>
+                      </a:r>
+                    </a:p>
+                  </a:txBody>
+                  <a:tcPr marL="73152" marR="54864" marT="27432" marB="27432" anchor="ctr">
+                    <a:solidFill>
+                      <a:srgbClr val="FFFFFF"/>
+                    </a:solidFill>
+                  </a:tcPr>
+                </a:tc>
+                <a:tc>
+                  <a:txBody>
+                    <a:bodyPr wrap="square"/>
+                    <a:lstStyle/>
+                    <a:p>
+                      <a:r>
+                        <a:rPr sz="700" b="0">
                           <a:solidFill>
                             <a:srgbClr val="16181D"/>
                           </a:solidFill>
@@ -7054,14 +7491,14 @@
                   </a:tcPr>
                 </a:tc>
               </a:tr>
-              <a:tr h="457200">
+              <a:tr h="475488">
                 <a:tc>
                   <a:txBody>
                     <a:bodyPr wrap="square"/>
                     <a:lstStyle/>
                     <a:p>
                       <a:r>
-                        <a:rPr sz="780" b="1">
+                        <a:rPr sz="700" b="1">
                           <a:solidFill>
                             <a:srgbClr val="16181D"/>
                           </a:solidFill>
@@ -7083,7 +7520,7 @@
                     <a:lstStyle/>
                     <a:p>
                       <a:r>
-                        <a:rPr sz="780" b="0">
+                        <a:rPr sz="700" b="0">
                           <a:solidFill>
                             <a:srgbClr val="16181D"/>
                           </a:solidFill>
@@ -7105,7 +7542,7 @@
                     <a:lstStyle/>
                     <a:p>
                       <a:r>
-                        <a:rPr sz="780" b="0">
+                        <a:rPr sz="700" b="0">
                           <a:solidFill>
                             <a:srgbClr val="16181D"/>
                           </a:solidFill>
@@ -7127,7 +7564,7 @@
                     <a:lstStyle/>
                     <a:p>
                       <a:r>
-                        <a:rPr sz="780" b="0">
+                        <a:rPr sz="700" b="0">
                           <a:solidFill>
                             <a:srgbClr val="16181D"/>
                           </a:solidFill>
@@ -7149,7 +7586,29 @@
                     <a:lstStyle/>
                     <a:p>
                       <a:r>
-                        <a:rPr sz="780" b="0">
+                        <a:rPr sz="700" b="0">
+                          <a:solidFill>
+                            <a:srgbClr val="16181D"/>
+                          </a:solidFill>
+                          <a:latin typeface="Aptos"/>
+                        </a:rPr>
+                        <a:t>Backlog: self-healing connectors, schema-drift auto-remediation candidates</a:t>
+                      </a:r>
+                    </a:p>
+                  </a:txBody>
+                  <a:tcPr marL="73152" marR="54864" marT="27432" marB="27432" anchor="ctr">
+                    <a:solidFill>
+                      <a:srgbClr val="FFFFFF"/>
+                    </a:solidFill>
+                  </a:tcPr>
+                </a:tc>
+                <a:tc>
+                  <a:txBody>
+                    <a:bodyPr wrap="square"/>
+                    <a:lstStyle/>
+                    <a:p>
+                      <a:r>
+                        <a:rPr sz="700" b="0">
                           <a:solidFill>
                             <a:srgbClr val="16181D"/>
                           </a:solidFill>
@@ -7166,14 +7625,14 @@
                   </a:tcPr>
                 </a:tc>
               </a:tr>
-              <a:tr h="457200">
+              <a:tr h="475488">
                 <a:tc>
                   <a:txBody>
                     <a:bodyPr wrap="square"/>
                     <a:lstStyle/>
                     <a:p>
                       <a:r>
-                        <a:rPr sz="780" b="1">
+                        <a:rPr sz="700" b="1">
                           <a:solidFill>
                             <a:srgbClr val="16181D"/>
                           </a:solidFill>
@@ -7195,7 +7654,7 @@
                     <a:lstStyle/>
                     <a:p>
                       <a:r>
-                        <a:rPr sz="780" b="0">
+                        <a:rPr sz="700" b="0">
                           <a:solidFill>
                             <a:srgbClr val="16181D"/>
                           </a:solidFill>
@@ -7217,7 +7676,7 @@
                     <a:lstStyle/>
                     <a:p>
                       <a:r>
-                        <a:rPr sz="780" b="0">
+                        <a:rPr sz="700" b="0">
                           <a:solidFill>
                             <a:srgbClr val="16181D"/>
                           </a:solidFill>
@@ -7239,7 +7698,7 @@
                     <a:lstStyle/>
                     <a:p>
                       <a:r>
-                        <a:rPr sz="780" b="0">
+                        <a:rPr sz="700" b="0">
                           <a:solidFill>
                             <a:srgbClr val="16181D"/>
                           </a:solidFill>
@@ -7261,7 +7720,29 @@
                     <a:lstStyle/>
                     <a:p>
                       <a:r>
-                        <a:rPr sz="780" b="0">
+                        <a:rPr sz="700" b="0">
+                          <a:solidFill>
+                            <a:srgbClr val="16181D"/>
+                          </a:solidFill>
+                          <a:latin typeface="Aptos"/>
+                        </a:rPr>
+                        <a:t>Backlog: flaky-pipeline auto-remediation, policy-as-code dial-up candidates</a:t>
+                      </a:r>
+                    </a:p>
+                  </a:txBody>
+                  <a:tcPr marL="73152" marR="54864" marT="27432" marB="27432" anchor="ctr">
+                    <a:solidFill>
+                      <a:srgbClr val="FFFFFF"/>
+                    </a:solidFill>
+                  </a:tcPr>
+                </a:tc>
+                <a:tc>
+                  <a:txBody>
+                    <a:bodyPr wrap="square"/>
+                    <a:lstStyle/>
+                    <a:p>
+                      <a:r>
+                        <a:rPr sz="700" b="0">
                           <a:solidFill>
                             <a:srgbClr val="16181D"/>
                           </a:solidFill>
@@ -7278,14 +7759,14 @@
                   </a:tcPr>
                 </a:tc>
               </a:tr>
-              <a:tr h="457200">
+              <a:tr h="475488">
                 <a:tc>
                   <a:txBody>
                     <a:bodyPr wrap="square"/>
                     <a:lstStyle/>
                     <a:p>
                       <a:r>
-                        <a:rPr sz="780" b="1">
+                        <a:rPr sz="700" b="1">
                           <a:solidFill>
                             <a:srgbClr val="16181D"/>
                           </a:solidFill>
@@ -7307,7 +7788,7 @@
                     <a:lstStyle/>
                     <a:p>
                       <a:r>
-                        <a:rPr sz="780" b="0">
+                        <a:rPr sz="700" b="0">
                           <a:solidFill>
                             <a:srgbClr val="16181D"/>
                           </a:solidFill>
@@ -7329,7 +7810,7 @@
                     <a:lstStyle/>
                     <a:p>
                       <a:r>
-                        <a:rPr sz="780" b="0">
+                        <a:rPr sz="700" b="0">
                           <a:solidFill>
                             <a:srgbClr val="16181D"/>
                           </a:solidFill>
@@ -7351,7 +7832,7 @@
                     <a:lstStyle/>
                     <a:p>
                       <a:r>
-                        <a:rPr sz="780" b="0">
+                        <a:rPr sz="700" b="0">
                           <a:solidFill>
                             <a:srgbClr val="16181D"/>
                           </a:solidFill>
@@ -7373,7 +7854,29 @@
                     <a:lstStyle/>
                     <a:p>
                       <a:r>
-                        <a:rPr sz="780" b="0">
+                        <a:rPr sz="700" b="0">
+                          <a:solidFill>
+                            <a:srgbClr val="16181D"/>
+                          </a:solidFill>
+                          <a:latin typeface="Aptos"/>
+                        </a:rPr>
+                        <a:t>Backlog: self-heal and auto-scale recipes, drift-correction candidates</a:t>
+                      </a:r>
+                    </a:p>
+                  </a:txBody>
+                  <a:tcPr marL="73152" marR="54864" marT="27432" marB="27432" anchor="ctr">
+                    <a:solidFill>
+                      <a:srgbClr val="FFFFFF"/>
+                    </a:solidFill>
+                  </a:tcPr>
+                </a:tc>
+                <a:tc>
+                  <a:txBody>
+                    <a:bodyPr wrap="square"/>
+                    <a:lstStyle/>
+                    <a:p>
+                      <a:r>
+                        <a:rPr sz="700" b="0">
                           <a:solidFill>
                             <a:srgbClr val="16181D"/>
                           </a:solidFill>
@@ -7390,14 +7893,14 @@
                   </a:tcPr>
                 </a:tc>
               </a:tr>
-              <a:tr h="457200">
+              <a:tr h="475488">
                 <a:tc>
                   <a:txBody>
                     <a:bodyPr wrap="square"/>
                     <a:lstStyle/>
                     <a:p>
                       <a:r>
-                        <a:rPr sz="780" b="1">
+                        <a:rPr sz="700" b="1">
                           <a:solidFill>
                             <a:srgbClr val="16181D"/>
                           </a:solidFill>
@@ -7419,7 +7922,7 @@
                     <a:lstStyle/>
                     <a:p>
                       <a:r>
-                        <a:rPr sz="780" b="0">
+                        <a:rPr sz="700" b="0">
                           <a:solidFill>
                             <a:srgbClr val="16181D"/>
                           </a:solidFill>
@@ -7441,7 +7944,7 @@
                     <a:lstStyle/>
                     <a:p>
                       <a:r>
-                        <a:rPr sz="780" b="0">
+                        <a:rPr sz="700" b="0">
                           <a:solidFill>
                             <a:srgbClr val="16181D"/>
                           </a:solidFill>
@@ -7463,7 +7966,7 @@
                     <a:lstStyle/>
                     <a:p>
                       <a:r>
-                        <a:rPr sz="780" b="0">
+                        <a:rPr sz="700" b="0">
                           <a:solidFill>
                             <a:srgbClr val="16181D"/>
                           </a:solidFill>
@@ -7485,7 +7988,29 @@
                     <a:lstStyle/>
                     <a:p>
                       <a:r>
-                        <a:rPr sz="780" b="0">
+                        <a:rPr sz="700" b="0">
+                          <a:solidFill>
+                            <a:srgbClr val="16181D"/>
+                          </a:solidFill>
+                          <a:latin typeface="Aptos"/>
+                        </a:rPr>
+                        <a:t>Backlog: auto-RCA, alert-noise reduction, SLO-guard automation candidates</a:t>
+                      </a:r>
+                    </a:p>
+                  </a:txBody>
+                  <a:tcPr marL="73152" marR="54864" marT="27432" marB="27432" anchor="ctr">
+                    <a:solidFill>
+                      <a:srgbClr val="FFFFFF"/>
+                    </a:solidFill>
+                  </a:tcPr>
+                </a:tc>
+                <a:tc>
+                  <a:txBody>
+                    <a:bodyPr wrap="square"/>
+                    <a:lstStyle/>
+                    <a:p>
+                      <a:r>
+                        <a:rPr sz="700" b="0">
                           <a:solidFill>
                             <a:srgbClr val="16181D"/>
                           </a:solidFill>
@@ -7502,14 +8027,14 @@
                   </a:tcPr>
                 </a:tc>
               </a:tr>
-              <a:tr h="457200">
+              <a:tr h="475488">
                 <a:tc>
                   <a:txBody>
                     <a:bodyPr wrap="square"/>
                     <a:lstStyle/>
                     <a:p>
                       <a:r>
-                        <a:rPr sz="780" b="1">
+                        <a:rPr sz="700" b="1">
                           <a:solidFill>
                             <a:srgbClr val="16181D"/>
                           </a:solidFill>
@@ -7531,7 +8056,7 @@
                     <a:lstStyle/>
                     <a:p>
                       <a:r>
-                        <a:rPr sz="780" b="0">
+                        <a:rPr sz="700" b="0">
                           <a:solidFill>
                             <a:srgbClr val="16181D"/>
                           </a:solidFill>
@@ -7553,7 +8078,7 @@
                     <a:lstStyle/>
                     <a:p>
                       <a:r>
-                        <a:rPr sz="780" b="0">
+                        <a:rPr sz="700" b="0">
                           <a:solidFill>
                             <a:srgbClr val="16181D"/>
                           </a:solidFill>
@@ -7575,7 +8100,7 @@
                     <a:lstStyle/>
                     <a:p>
                       <a:r>
-                        <a:rPr sz="780" b="0">
+                        <a:rPr sz="700" b="0">
                           <a:solidFill>
                             <a:srgbClr val="16181D"/>
                           </a:solidFill>
@@ -7597,7 +8122,29 @@
                     <a:lstStyle/>
                     <a:p>
                       <a:r>
-                        <a:rPr sz="780" b="0">
+                        <a:rPr sz="700" b="0">
+                          <a:solidFill>
+                            <a:srgbClr val="16181D"/>
+                          </a:solidFill>
+                          <a:latin typeface="Aptos"/>
+                        </a:rPr>
+                        <a:t>Backlog: self-maintaining tests, failure auto-triage, risk-based selection</a:t>
+                      </a:r>
+                    </a:p>
+                  </a:txBody>
+                  <a:tcPr marL="73152" marR="54864" marT="27432" marB="27432" anchor="ctr">
+                    <a:solidFill>
+                      <a:srgbClr val="FFFFFF"/>
+                    </a:solidFill>
+                  </a:tcPr>
+                </a:tc>
+                <a:tc>
+                  <a:txBody>
+                    <a:bodyPr wrap="square"/>
+                    <a:lstStyle/>
+                    <a:p>
+                      <a:r>
+                        <a:rPr sz="700" b="0">
                           <a:solidFill>
                             <a:srgbClr val="16181D"/>
                           </a:solidFill>
@@ -25828,7 +26375,7 @@
                 </a:solidFill>
                 <a:latin typeface="Aptos"/>
               </a:rPr>
-              <a:t>Sapient Delivery Lead</a:t>
+              <a:t>Sapient Engagement Principal</a:t>
             </a:r>
           </a:p>
           <a:p>
